--- a/lessons/technical_indicators_in_r.pptx
+++ b/lessons/technical_indicators_in_r.pptx
@@ -4,9 +4,6 @@
   <p:sldMasterIdLst>
     <p:sldMasterId id="2147483648" r:id="rId1"/>
   </p:sldMasterIdLst>
-  <p:notesMasterIdLst>
-    <p:notesMasterId r:id="rId20"/>
-  </p:notesMasterIdLst>
   <p:sldIdLst>
     <p:sldId id="256" r:id="rId2"/>
     <p:sldId id="257" r:id="rId3"/>
@@ -27,6 +24,9 @@
     <p:sldId id="272" r:id="rId18"/>
     <p:sldId id="273" r:id="rId19"/>
   </p:sldIdLst>
+  <p:notesMasterIdLst>
+    <p:notesMasterId r:id="rId20"/>
+  </p:notesMasterIdLst>
   <p:sldSz cx="12192000" cy="6858000"/>
   <p:notesSz cx="6858000" cy="12192000"/>
   <p:defaultTextStyle>
@@ -121,11 +121,6 @@
       </a:defRPr>
     </a:lvl9pPr>
   </p:defaultTextStyle>
-  <p:extLst>
-    <p:ext uri="{EFAFB233-063F-42B5-8137-9DF3F51BA10A}">
-      <p15:sldGuideLst xmlns:p15="http://schemas.microsoft.com/office/powerpoint/2012/main"/>
-    </p:ext>
-  </p:extLst>
 </p:presentation>
 </file>
 
@@ -151,10 +146,234 @@
           <a:chExt cx="0" cy="0"/>
         </a:xfrm>
       </p:grpSpPr>
+      <p:sp>
+        <p:nvSpPr>
+          <p:cNvPr id="2" name="Header Placeholder 1"/>
+          <p:cNvSpPr>
+            <a:spLocks noGrp="1"/>
+          </p:cNvSpPr>
+          <p:nvPr>
+            <p:ph type="hdr" sz="quarter"/>
+          </p:nvPr>
+        </p:nvSpPr>
+        <p:spPr>
+          <a:xfrm>
+            <a:off x="0" y="0"/>
+            <a:ext cx="2971800" cy="458788"/>
+          </a:xfrm>
+          <a:prstGeom prst="rect">
+            <a:avLst/>
+          </a:prstGeom>
+        </p:spPr>
+        <p:txBody>
+          <a:bodyPr vert="horz" lIns="91440" tIns="45720" rIns="91440" bIns="45720" rtlCol="0"/>
+          <a:lstStyle>
+            <a:lvl1pPr algn="l">
+              <a:defRPr sz="1200"/>
+            </a:lvl1pPr>
+          </a:lstStyle>
+          <a:p>
+            <a:endParaRPr lang="en-US"/>
+          </a:p>
+        </p:txBody>
+      </p:sp>
+      <p:sp>
+        <p:nvSpPr>
+          <p:cNvPr id="3" name="Date Placeholder 2"/>
+          <p:cNvSpPr>
+            <a:spLocks noGrp="1"/>
+          </p:cNvSpPr>
+          <p:nvPr>
+            <p:ph type="dt" idx="1"/>
+          </p:nvPr>
+        </p:nvSpPr>
+        <p:spPr>
+          <a:xfrm>
+            <a:off x="3884613" y="0"/>
+            <a:ext cx="2971800" cy="458788"/>
+          </a:xfrm>
+          <a:prstGeom prst="rect">
+            <a:avLst/>
+          </a:prstGeom>
+        </p:spPr>
+        <p:txBody>
+          <a:bodyPr vert="horz" lIns="91440" tIns="45720" rIns="91440" bIns="45720" rtlCol="0"/>
+          <a:lstStyle>
+            <a:lvl1pPr algn="r">
+              <a:defRPr sz="1200"/>
+            </a:lvl1pPr>
+          </a:lstStyle>
+          <a:p>
+            <a:fld id="{5282F153-3F37-0F45-9E97-73ACFA13230C}" type="datetimeFigureOut">
+              <a:rPr lang="en-US"/>
+              <a:t>7/23/19</a:t>
+            </a:fld>
+            <a:endParaRPr lang="en-US"/>
+          </a:p>
+        </p:txBody>
+      </p:sp>
+      <p:sp>
+        <p:nvSpPr>
+          <p:cNvPr id="4" name="Slide Image Placeholder 3"/>
+          <p:cNvSpPr>
+            <a:spLocks noGrp="1" noRot="1" noChangeAspect="1"/>
+          </p:cNvSpPr>
+          <p:nvPr>
+            <p:ph type="sldImg" idx="2"/>
+          </p:nvPr>
+        </p:nvSpPr>
+        <p:spPr>
+          <a:xfrm>
+            <a:off x="685800" y="1143000"/>
+            <a:ext cx="5486400" cy="3086100"/>
+          </a:xfrm>
+          <a:prstGeom prst="rect">
+            <a:avLst/>
+          </a:prstGeom>
+          <a:noFill/>
+          <a:ln w="12700">
+            <a:solidFill>
+              <a:prstClr val="black"/>
+            </a:solidFill>
+          </a:ln>
+        </p:spPr>
+        <p:txBody>
+          <a:bodyPr vert="horz" lIns="91440" tIns="45720" rIns="91440" bIns="45720" rtlCol="0" anchor="ctr"/>
+          <a:lstStyle/>
+          <a:p>
+            <a:endParaRPr lang="en-US"/>
+          </a:p>
+        </p:txBody>
+      </p:sp>
+      <p:sp>
+        <p:nvSpPr>
+          <p:cNvPr id="5" name="Notes Placeholder 4"/>
+          <p:cNvSpPr>
+            <a:spLocks noGrp="1"/>
+          </p:cNvSpPr>
+          <p:nvPr>
+            <p:ph type="body" sz="quarter" idx="3"/>
+          </p:nvPr>
+        </p:nvSpPr>
+        <p:spPr>
+          <a:xfrm>
+            <a:off x="685800" y="4400550"/>
+            <a:ext cx="5486400" cy="3600450"/>
+          </a:xfrm>
+          <a:prstGeom prst="rect">
+            <a:avLst/>
+          </a:prstGeom>
+        </p:spPr>
+        <p:txBody>
+          <a:bodyPr vert="horz" lIns="91440" tIns="45720" rIns="91440" bIns="45720" rtlCol="0"/>
+          <a:lstStyle/>
+          <a:p>
+            <a:pPr lvl="0"/>
+            <a:r>
+              <a:rPr lang="en-US"/>
+              <a:t>Click to edit Master text styles</a:t>
+            </a:r>
+          </a:p>
+          <a:p>
+            <a:pPr lvl="1"/>
+            <a:r>
+              <a:rPr lang="en-US"/>
+              <a:t>Second level</a:t>
+            </a:r>
+          </a:p>
+          <a:p>
+            <a:pPr lvl="2"/>
+            <a:r>
+              <a:rPr lang="en-US"/>
+              <a:t>Third level</a:t>
+            </a:r>
+          </a:p>
+          <a:p>
+            <a:pPr lvl="3"/>
+            <a:r>
+              <a:rPr lang="en-US"/>
+              <a:t>Fourth level</a:t>
+            </a:r>
+          </a:p>
+          <a:p>
+            <a:pPr lvl="4"/>
+            <a:r>
+              <a:rPr lang="en-US"/>
+              <a:t>Fifth level</a:t>
+            </a:r>
+          </a:p>
+        </p:txBody>
+      </p:sp>
+      <p:sp>
+        <p:nvSpPr>
+          <p:cNvPr id="6" name="Footer Placeholder 5"/>
+          <p:cNvSpPr>
+            <a:spLocks noGrp="1"/>
+          </p:cNvSpPr>
+          <p:nvPr>
+            <p:ph type="ftr" sz="quarter" idx="4"/>
+          </p:nvPr>
+        </p:nvSpPr>
+        <p:spPr>
+          <a:xfrm>
+            <a:off x="0" y="8685213"/>
+            <a:ext cx="2971800" cy="458787"/>
+          </a:xfrm>
+          <a:prstGeom prst="rect">
+            <a:avLst/>
+          </a:prstGeom>
+        </p:spPr>
+        <p:txBody>
+          <a:bodyPr vert="horz" lIns="91440" tIns="45720" rIns="91440" bIns="45720" rtlCol="0" anchor="b"/>
+          <a:lstStyle>
+            <a:lvl1pPr algn="l">
+              <a:defRPr sz="1200"/>
+            </a:lvl1pPr>
+          </a:lstStyle>
+          <a:p>
+            <a:endParaRPr lang="en-US"/>
+          </a:p>
+        </p:txBody>
+      </p:sp>
+      <p:sp>
+        <p:nvSpPr>
+          <p:cNvPr id="7" name="Slide Number Placeholder 6"/>
+          <p:cNvSpPr>
+            <a:spLocks noGrp="1"/>
+          </p:cNvSpPr>
+          <p:nvPr>
+            <p:ph type="sldNum" sz="quarter" idx="5"/>
+          </p:nvPr>
+        </p:nvSpPr>
+        <p:spPr>
+          <a:xfrm>
+            <a:off x="3884613" y="8685213"/>
+            <a:ext cx="2971800" cy="458787"/>
+          </a:xfrm>
+          <a:prstGeom prst="rect">
+            <a:avLst/>
+          </a:prstGeom>
+        </p:spPr>
+        <p:txBody>
+          <a:bodyPr vert="horz" lIns="91440" tIns="45720" rIns="91440" bIns="45720" rtlCol="0" anchor="b"/>
+          <a:lstStyle>
+            <a:lvl1pPr algn="r">
+              <a:defRPr sz="1200"/>
+            </a:lvl1pPr>
+          </a:lstStyle>
+          <a:p>
+            <a:fld id="{CE5E9CC1-C706-0F49-92D6-E571CC5EEA8F}" type="slidenum">
+              <a:rPr lang="en-US"/>
+              <a:t>‹#›</a:t>
+            </a:fld>
+            <a:endParaRPr lang="en-US"/>
+          </a:p>
+        </p:txBody>
+      </p:sp>
     </p:spTree>
     <p:extLst>
       <p:ext uri="{BB962C8B-B14F-4D97-AF65-F5344CB8AC3E}">
-        <p14:creationId xmlns:p14="http://schemas.microsoft.com/office/powerpoint/2010/main" val="376962854"/>
+        <p14:creationId xmlns:p14="http://schemas.microsoft.com/office/powerpoint/2010/main" val="1024086991"/>
       </p:ext>
     </p:extLst>
   </p:cSld>
@@ -298,6 +517,10 @@
           <a:bodyPr/>
           <a:lstStyle/>
           <a:p>
+            <a:r>
+              <a:rPr lang="en-US" dirty="0"/>
+              <a:t/>
+            </a:r>
             <a:endParaRPr lang="en-US" dirty="0"/>
           </a:p>
         </p:txBody>
@@ -382,6 +605,10 @@
           <a:bodyPr/>
           <a:lstStyle/>
           <a:p>
+            <a:r>
+              <a:rPr lang="en-US" dirty="0"/>
+              <a:t/>
+            </a:r>
             <a:endParaRPr lang="en-US" dirty="0"/>
           </a:p>
         </p:txBody>
@@ -466,6 +693,10 @@
           <a:bodyPr/>
           <a:lstStyle/>
           <a:p>
+            <a:r>
+              <a:rPr lang="en-US" dirty="0"/>
+              <a:t/>
+            </a:r>
             <a:endParaRPr lang="en-US" dirty="0"/>
           </a:p>
         </p:txBody>
@@ -550,6 +781,10 @@
           <a:bodyPr/>
           <a:lstStyle/>
           <a:p>
+            <a:r>
+              <a:rPr lang="en-US" dirty="0"/>
+              <a:t/>
+            </a:r>
             <a:endParaRPr lang="en-US" dirty="0"/>
           </a:p>
         </p:txBody>
@@ -634,6 +869,10 @@
           <a:bodyPr/>
           <a:lstStyle/>
           <a:p>
+            <a:r>
+              <a:rPr lang="en-US" dirty="0"/>
+              <a:t/>
+            </a:r>
             <a:endParaRPr lang="en-US" dirty="0"/>
           </a:p>
         </p:txBody>
@@ -718,6 +957,10 @@
           <a:bodyPr/>
           <a:lstStyle/>
           <a:p>
+            <a:r>
+              <a:rPr lang="en-US" dirty="0"/>
+              <a:t/>
+            </a:r>
             <a:endParaRPr lang="en-US" dirty="0"/>
           </a:p>
         </p:txBody>
@@ -802,6 +1045,10 @@
           <a:bodyPr/>
           <a:lstStyle/>
           <a:p>
+            <a:r>
+              <a:rPr lang="en-US" dirty="0"/>
+              <a:t/>
+            </a:r>
             <a:endParaRPr lang="en-US" dirty="0"/>
           </a:p>
         </p:txBody>
@@ -886,6 +1133,10 @@
           <a:bodyPr/>
           <a:lstStyle/>
           <a:p>
+            <a:r>
+              <a:rPr lang="en-US" dirty="0"/>
+              <a:t/>
+            </a:r>
             <a:endParaRPr lang="en-US" dirty="0"/>
           </a:p>
         </p:txBody>
@@ -970,6 +1221,10 @@
           <a:bodyPr/>
           <a:lstStyle/>
           <a:p>
+            <a:r>
+              <a:rPr lang="en-US" dirty="0"/>
+              <a:t/>
+            </a:r>
             <a:endParaRPr lang="en-US" dirty="0"/>
           </a:p>
         </p:txBody>
@@ -1058,6 +1313,7 @@
               <a:rPr lang="en-US" dirty="0"/>
               <a:t>Transition into the 11:00 Prompt Engineering session. EMA is now covered: the deck explains it right after the SMA and lag slide, B_TTR.R compares SMA and EMA on the same chart, and D_TTR.R calculates MACD both ways (SMA and EMA) side by side before continuing with EMA for the backtest.</a:t>
             </a:r>
+            <a:endParaRPr lang="en-US" dirty="0"/>
           </a:p>
         </p:txBody>
       </p:sp>
@@ -1141,6 +1397,10 @@
           <a:bodyPr/>
           <a:lstStyle/>
           <a:p>
+            <a:r>
+              <a:rPr lang="en-US" dirty="0"/>
+              <a:t/>
+            </a:r>
             <a:endParaRPr lang="en-US" dirty="0"/>
           </a:p>
         </p:txBody>
@@ -1225,6 +1485,10 @@
           <a:bodyPr/>
           <a:lstStyle/>
           <a:p>
+            <a:r>
+              <a:rPr lang="en-US" dirty="0"/>
+              <a:t/>
+            </a:r>
             <a:endParaRPr lang="en-US" dirty="0"/>
           </a:p>
         </p:txBody>
@@ -1309,6 +1573,10 @@
           <a:bodyPr/>
           <a:lstStyle/>
           <a:p>
+            <a:r>
+              <a:rPr lang="en-US" dirty="0"/>
+              <a:t/>
+            </a:r>
             <a:endParaRPr lang="en-US" dirty="0"/>
           </a:p>
         </p:txBody>
@@ -1393,6 +1661,10 @@
           <a:bodyPr/>
           <a:lstStyle/>
           <a:p>
+            <a:r>
+              <a:rPr lang="en-US" dirty="0"/>
+              <a:t/>
+            </a:r>
             <a:endParaRPr lang="en-US" dirty="0"/>
           </a:p>
         </p:txBody>
@@ -1477,6 +1749,10 @@
           <a:bodyPr/>
           <a:lstStyle/>
           <a:p>
+            <a:r>
+              <a:rPr lang="en-US" dirty="0"/>
+              <a:t/>
+            </a:r>
             <a:endParaRPr lang="en-US" dirty="0"/>
           </a:p>
         </p:txBody>
@@ -1561,6 +1837,10 @@
           <a:bodyPr/>
           <a:lstStyle/>
           <a:p>
+            <a:r>
+              <a:rPr lang="en-US" dirty="0"/>
+              <a:t/>
+            </a:r>
             <a:endParaRPr lang="en-US" dirty="0"/>
           </a:p>
         </p:txBody>
@@ -1645,6 +1925,10 @@
           <a:bodyPr/>
           <a:lstStyle/>
           <a:p>
+            <a:r>
+              <a:rPr lang="en-US" dirty="0"/>
+              <a:t/>
+            </a:r>
             <a:endParaRPr lang="en-US" dirty="0"/>
           </a:p>
         </p:txBody>
@@ -1729,6 +2013,10 @@
           <a:bodyPr/>
           <a:lstStyle/>
           <a:p>
+            <a:r>
+              <a:rPr lang="en-US" dirty="0"/>
+              <a:t/>
+            </a:r>
             <a:endParaRPr lang="en-US" dirty="0"/>
           </a:p>
         </p:txBody>
@@ -1802,11 +2090,6 @@
 <file path=ppt/slideMasters/slideMaster1.xml><?xml version="1.0" encoding="utf-8"?>
 <p:sldMaster xmlns:a="http://schemas.openxmlformats.org/drawingml/2006/main" xmlns:r="http://schemas.openxmlformats.org/officeDocument/2006/relationships" xmlns:p="http://schemas.openxmlformats.org/presentationml/2006/main">
   <p:cSld>
-    <p:bg>
-      <p:bgRef idx="1001">
-        <a:schemeClr val="bg1"/>
-      </p:bgRef>
-    </p:bg>
     <p:spTree>
       <p:nvGrpSpPr>
         <p:cNvPr id="1" name=""/>
@@ -2089,7 +2372,6 @@
         <a:solidFill>
           <a:srgbClr val="14213D"/>
         </a:solidFill>
-        <a:effectLst/>
       </p:bgPr>
     </p:bg>
     <p:spTree>
@@ -2172,14 +2454,14 @@
       </p:sp>
       <p:pic>
         <p:nvPicPr>
-          <p:cNvPr id="5" name="Image 0" descr="preencoded.png"/>
+          <p:cNvPr id="5" name="Image 0" descr="preencoded.png">    </p:cNvPr>
           <p:cNvPicPr>
             <a:picLocks noChangeAspect="1"/>
           </p:cNvPicPr>
           <p:nvPr/>
         </p:nvPicPr>
         <p:blipFill>
-          <a:blip r:embed="rId3"/>
+          <a:blip r:embed="rId1"/>
           <a:stretch>
             <a:fillRect/>
           </a:stretch>
@@ -2215,11 +2497,11 @@
           <a:bodyPr wrap="square" rtlCol="0" anchor="ctr"/>
           <a:lstStyle/>
           <a:p>
-            <a:pPr marL="0" indent="0">
-              <a:buNone/>
-            </a:pPr>
-            <a:r>
-              <a:rPr lang="en-US" sz="1300" b="1" kern="0" spc="200" dirty="0">
+            <a:pPr indent="0" marL="0">
+              <a:buNone/>
+            </a:pPr>
+            <a:r>
+              <a:rPr lang="en-US" sz="1300" b="1" spc="200" kern="0" dirty="0">
                 <a:solidFill>
                   <a:srgbClr val="9A6B2C"/>
                 </a:solidFill>
@@ -2254,7 +2536,7 @@
           <a:bodyPr wrap="square" rtlCol="0" anchor="ctr"/>
           <a:lstStyle/>
           <a:p>
-            <a:pPr marL="0" indent="0">
+            <a:pPr indent="0" marL="0">
               <a:buNone/>
             </a:pPr>
             <a:r>
@@ -2293,7 +2575,7 @@
           <a:bodyPr wrap="square" rtlCol="0" anchor="ctr"/>
           <a:lstStyle/>
           <a:p>
-            <a:pPr marL="0" indent="0">
+            <a:pPr indent="0" marL="0">
               <a:buNone/>
             </a:pPr>
             <a:r>
@@ -2332,7 +2614,7 @@
           <a:bodyPr wrap="square" rtlCol="0" anchor="ctr"/>
           <a:lstStyle/>
           <a:p>
-            <a:pPr marL="0" indent="0">
+            <a:pPr indent="0" marL="0">
               <a:buNone/>
             </a:pPr>
             <a:r>
@@ -2366,7 +2648,6 @@
         <a:solidFill>
           <a:srgbClr val="FAFAF7"/>
         </a:solidFill>
-        <a:effectLst/>
       </p:bgPr>
     </p:bg>
     <p:spTree>
@@ -2404,7 +2685,7 @@
           <a:bodyPr wrap="square" rtlCol="0" anchor="ctr"/>
           <a:lstStyle/>
           <a:p>
-            <a:pPr marL="0" indent="0">
+            <a:pPr indent="0" marL="0">
               <a:buNone/>
             </a:pPr>
             <a:r>
@@ -2443,7 +2724,7 @@
           </a:solidFill>
           <a:ln/>
           <a:effectLst>
-            <a:outerShdw blurRad="63500" dist="25400" dir="5400000" algn="bl" rotWithShape="0">
+            <a:outerShdw sx="100000" sy="100000" kx="0" ky="0" algn="bl" rotWithShape="0" blurRad="63500" dist="25400" dir="5400000">
               <a:srgbClr val="000000">
                 <a:alpha val="8000"/>
               </a:srgbClr>
@@ -2472,7 +2753,7 @@
           <a:bodyPr wrap="square" rtlCol="0" anchor="ctr"/>
           <a:lstStyle/>
           <a:p>
-            <a:pPr marL="0" indent="0">
+            <a:pPr indent="0" marL="0">
               <a:buNone/>
             </a:pPr>
             <a:r>
@@ -2511,7 +2792,7 @@
           <a:bodyPr wrap="square" rtlCol="0" anchor="ctr"/>
           <a:lstStyle/>
           <a:p>
-            <a:pPr marL="0" indent="0">
+            <a:pPr indent="0" marL="0">
               <a:buNone/>
             </a:pPr>
             <a:r>
@@ -2550,7 +2831,7 @@
           <a:bodyPr wrap="square" rtlCol="0" anchor="ctr"/>
           <a:lstStyle/>
           <a:p>
-            <a:pPr marL="0" indent="0">
+            <a:pPr indent="0" marL="0">
               <a:buNone/>
             </a:pPr>
             <a:r>
@@ -2589,7 +2870,7 @@
           <a:bodyPr wrap="square" rtlCol="0" anchor="ctr"/>
           <a:lstStyle/>
           <a:p>
-            <a:pPr marL="0" indent="0">
+            <a:pPr indent="0" marL="0">
               <a:buNone/>
             </a:pPr>
             <a:r>
@@ -2648,7 +2929,7 @@
           <a:bodyPr wrap="square" rtlCol="0" anchor="ctr"/>
           <a:lstStyle/>
           <a:p>
-            <a:pPr marL="0" indent="0">
+            <a:pPr indent="0" marL="0">
               <a:buNone/>
             </a:pPr>
             <a:r>
@@ -2687,7 +2968,7 @@
           <a:bodyPr wrap="square" rtlCol="0" anchor="ctr"/>
           <a:lstStyle/>
           <a:p>
-            <a:pPr marL="0" indent="0">
+            <a:pPr indent="0" marL="0">
               <a:buNone/>
             </a:pPr>
             <a:r>
@@ -2726,7 +3007,7 @@
           <a:bodyPr wrap="square" rtlCol="0" anchor="ctr"/>
           <a:lstStyle/>
           <a:p>
-            <a:pPr marL="0" indent="0">
+            <a:pPr indent="0" marL="0">
               <a:buNone/>
             </a:pPr>
             <a:r>
@@ -2785,7 +3066,7 @@
           <a:bodyPr wrap="square" rtlCol="0" anchor="ctr"/>
           <a:lstStyle/>
           <a:p>
-            <a:pPr marL="0" indent="0">
+            <a:pPr indent="0" marL="0">
               <a:buNone/>
             </a:pPr>
             <a:r>
@@ -2824,7 +3105,7 @@
           <a:bodyPr wrap="square" rtlCol="0" anchor="ctr"/>
           <a:lstStyle/>
           <a:p>
-            <a:pPr marL="0" indent="0">
+            <a:pPr indent="0" marL="0">
               <a:buNone/>
             </a:pPr>
             <a:r>
@@ -2863,7 +3144,7 @@
           <a:bodyPr wrap="square" rtlCol="0" anchor="ctr"/>
           <a:lstStyle/>
           <a:p>
-            <a:pPr marL="0" indent="0">
+            <a:pPr indent="0" marL="0">
               <a:buNone/>
             </a:pPr>
             <a:endParaRPr lang="en-US" sz="1250" dirty="0"/>
@@ -2911,7 +3192,7 @@
           <a:bodyPr wrap="square" rtlCol="0" anchor="ctr"/>
           <a:lstStyle/>
           <a:p>
-            <a:pPr marL="0" indent="0">
+            <a:pPr indent="0" marL="0">
               <a:buNone/>
             </a:pPr>
             <a:r>
@@ -2950,7 +3231,7 @@
           <a:bodyPr wrap="square" rtlCol="0" anchor="ctr"/>
           <a:lstStyle/>
           <a:p>
-            <a:pPr marL="0" indent="0">
+            <a:pPr indent="0" marL="0">
               <a:buNone/>
             </a:pPr>
             <a:r>
@@ -2989,7 +3270,7 @@
           <a:bodyPr wrap="square" rtlCol="0" anchor="ctr"/>
           <a:lstStyle/>
           <a:p>
-            <a:pPr marL="0" indent="0">
+            <a:pPr indent="0" marL="0">
               <a:buNone/>
             </a:pPr>
             <a:endParaRPr lang="en-US" sz="1250" dirty="0"/>
@@ -3037,7 +3318,7 @@
           <a:bodyPr wrap="square" rtlCol="0" anchor="ctr"/>
           <a:lstStyle/>
           <a:p>
-            <a:pPr marL="0" indent="0">
+            <a:pPr indent="0" marL="0">
               <a:buNone/>
             </a:pPr>
             <a:r>
@@ -3076,7 +3357,7 @@
           <a:bodyPr wrap="square" rtlCol="0" anchor="ctr"/>
           <a:lstStyle/>
           <a:p>
-            <a:pPr marL="0" indent="0">
+            <a:pPr indent="0" marL="0">
               <a:buNone/>
             </a:pPr>
             <a:r>
@@ -3115,7 +3396,7 @@
           <a:bodyPr wrap="square" rtlCol="0" anchor="ctr"/>
           <a:lstStyle/>
           <a:p>
-            <a:pPr marL="0" indent="0">
+            <a:pPr indent="0" marL="0">
               <a:buNone/>
             </a:pPr>
             <a:r>
@@ -3174,7 +3455,7 @@
           <a:bodyPr wrap="square" rtlCol="0" anchor="ctr"/>
           <a:lstStyle/>
           <a:p>
-            <a:pPr marL="0" indent="0">
+            <a:pPr indent="0" marL="0">
               <a:buNone/>
             </a:pPr>
             <a:r>
@@ -3213,7 +3494,7 @@
           <a:bodyPr wrap="square" rtlCol="0" anchor="ctr"/>
           <a:lstStyle/>
           <a:p>
-            <a:pPr marL="0" indent="0">
+            <a:pPr indent="0" marL="0">
               <a:buNone/>
             </a:pPr>
             <a:r>
@@ -3252,7 +3533,7 @@
           <a:bodyPr wrap="square" rtlCol="0" anchor="ctr"/>
           <a:lstStyle/>
           <a:p>
-            <a:pPr marL="0" indent="0">
+            <a:pPr indent="0" marL="0">
               <a:buNone/>
             </a:pPr>
             <a:r>
@@ -3311,7 +3592,7 @@
           <a:bodyPr wrap="square" rtlCol="0" anchor="ctr"/>
           <a:lstStyle/>
           <a:p>
-            <a:pPr marL="0" indent="0">
+            <a:pPr indent="0" marL="0">
               <a:buNone/>
             </a:pPr>
             <a:r>
@@ -3350,7 +3631,7 @@
           <a:bodyPr wrap="square" rtlCol="0" anchor="ctr"/>
           <a:lstStyle/>
           <a:p>
-            <a:pPr marL="0" indent="0">
+            <a:pPr indent="0" marL="0">
               <a:buNone/>
             </a:pPr>
             <a:r>
@@ -3389,7 +3670,7 @@
           <a:bodyPr wrap="square" rtlCol="0" anchor="ctr"/>
           <a:lstStyle/>
           <a:p>
-            <a:pPr marL="0" indent="0">
+            <a:pPr indent="0" marL="0">
               <a:buNone/>
             </a:pPr>
             <a:r>
@@ -3428,7 +3709,7 @@
           <a:bodyPr wrap="square" rtlCol="0" anchor="ctr"/>
           <a:lstStyle/>
           <a:p>
-            <a:pPr marL="0" indent="0">
+            <a:pPr indent="0" marL="0">
               <a:buNone/>
             </a:pPr>
             <a:r>
@@ -3462,7 +3743,6 @@
         <a:solidFill>
           <a:srgbClr val="FAFAF7"/>
         </a:solidFill>
-        <a:effectLst/>
       </p:bgPr>
     </p:bg>
     <p:spTree>
@@ -3500,7 +3780,7 @@
           <a:bodyPr wrap="square" rtlCol="0" anchor="ctr"/>
           <a:lstStyle/>
           <a:p>
-            <a:pPr marL="0" indent="0">
+            <a:pPr indent="0" marL="0">
               <a:buNone/>
             </a:pPr>
             <a:r>
@@ -3559,7 +3839,7 @@
           <a:bodyPr wrap="square" rtlCol="0" anchor="ctr"/>
           <a:lstStyle/>
           <a:p>
-            <a:pPr marL="0" indent="0">
+            <a:pPr indent="0" marL="0">
               <a:buNone/>
             </a:pPr>
             <a:endParaRPr lang="en-US" dirty="0"/>
@@ -3587,7 +3867,7 @@
           <a:bodyPr wrap="square" rtlCol="0" anchor="ctr"/>
           <a:lstStyle/>
           <a:p>
-            <a:pPr marL="0" indent="0" algn="ctr">
+            <a:pPr algn="ctr" indent="0" marL="0">
               <a:buNone/>
             </a:pPr>
             <a:r>
@@ -3626,7 +3906,7 @@
           <a:bodyPr wrap="square" rtlCol="0" anchor="ctr"/>
           <a:lstStyle/>
           <a:p>
-            <a:pPr marL="0" indent="0" algn="ctr">
+            <a:pPr algn="ctr" indent="0" marL="0">
               <a:buNone/>
             </a:pPr>
             <a:r>
@@ -3685,7 +3965,7 @@
           <a:bodyPr wrap="square" rtlCol="0" anchor="ctr"/>
           <a:lstStyle/>
           <a:p>
-            <a:pPr marL="0" indent="0">
+            <a:pPr indent="0" marL="0">
               <a:buNone/>
             </a:pPr>
             <a:r>
@@ -3724,7 +4004,7 @@
           <a:bodyPr wrap="square" rtlCol="0" anchor="ctr"/>
           <a:lstStyle/>
           <a:p>
-            <a:pPr marL="0" indent="0">
+            <a:pPr indent="0" marL="0">
               <a:buNone/>
             </a:pPr>
             <a:r>
@@ -3763,7 +4043,7 @@
           <a:bodyPr wrap="square" rtlCol="0" anchor="ctr"/>
           <a:lstStyle/>
           <a:p>
-            <a:pPr marL="0" indent="0">
+            <a:pPr indent="0" marL="0">
               <a:buNone/>
             </a:pPr>
             <a:r>
@@ -3822,7 +4102,7 @@
           <a:bodyPr wrap="square" rtlCol="0" anchor="ctr"/>
           <a:lstStyle/>
           <a:p>
-            <a:pPr marL="0" indent="0">
+            <a:pPr indent="0" marL="0">
               <a:buNone/>
             </a:pPr>
             <a:r>
@@ -3861,7 +4141,7 @@
           <a:bodyPr wrap="square" rtlCol="0" anchor="ctr"/>
           <a:lstStyle/>
           <a:p>
-            <a:pPr marL="0" indent="0">
+            <a:pPr indent="0" marL="0">
               <a:buNone/>
             </a:pPr>
             <a:r>
@@ -3900,7 +4180,7 @@
           <a:bodyPr wrap="square" rtlCol="0" anchor="ctr"/>
           <a:lstStyle/>
           <a:p>
-            <a:pPr marL="0" indent="0">
+            <a:pPr indent="0" marL="0">
               <a:buNone/>
             </a:pPr>
             <a:r>
@@ -3959,7 +4239,7 @@
           <a:bodyPr wrap="square" rtlCol="0" anchor="ctr"/>
           <a:lstStyle/>
           <a:p>
-            <a:pPr marL="0" indent="0">
+            <a:pPr indent="0" marL="0">
               <a:buNone/>
             </a:pPr>
             <a:r>
@@ -3998,7 +4278,7 @@
           <a:bodyPr wrap="square" rtlCol="0" anchor="ctr"/>
           <a:lstStyle/>
           <a:p>
-            <a:pPr marL="0" indent="0">
+            <a:pPr indent="0" marL="0">
               <a:buNone/>
             </a:pPr>
             <a:r>
@@ -4037,7 +4317,7 @@
           <a:bodyPr wrap="square" rtlCol="0" anchor="ctr"/>
           <a:lstStyle/>
           <a:p>
-            <a:pPr marL="0" indent="0">
+            <a:pPr indent="0" marL="0">
               <a:buNone/>
             </a:pPr>
             <a:r>
@@ -4096,7 +4376,7 @@
           <a:bodyPr wrap="square" rtlCol="0" anchor="ctr"/>
           <a:lstStyle/>
           <a:p>
-            <a:pPr marL="0" indent="0">
+            <a:pPr indent="0" marL="0">
               <a:buNone/>
             </a:pPr>
             <a:r>
@@ -4135,7 +4415,7 @@
           <a:bodyPr wrap="square" rtlCol="0" anchor="ctr"/>
           <a:lstStyle/>
           <a:p>
-            <a:pPr marL="0" indent="0">
+            <a:pPr indent="0" marL="0">
               <a:buNone/>
             </a:pPr>
             <a:r>
@@ -4174,7 +4454,7 @@
           <a:bodyPr wrap="square" rtlCol="0" anchor="ctr"/>
           <a:lstStyle/>
           <a:p>
-            <a:pPr marL="0" indent="0">
+            <a:pPr indent="0" marL="0">
               <a:buNone/>
             </a:pPr>
             <a:r>
@@ -4213,7 +4493,7 @@
           <a:bodyPr wrap="square" rtlCol="0" anchor="ctr"/>
           <a:lstStyle/>
           <a:p>
-            <a:pPr marL="0" indent="0">
+            <a:pPr indent="0" marL="0">
               <a:buNone/>
             </a:pPr>
             <a:r>
@@ -4252,7 +4532,7 @@
           <a:bodyPr wrap="square" rtlCol="0" anchor="ctr"/>
           <a:lstStyle/>
           <a:p>
-            <a:pPr marL="0" indent="0">
+            <a:pPr indent="0" marL="0">
               <a:buNone/>
             </a:pPr>
             <a:r>
@@ -4286,7 +4566,6 @@
         <a:solidFill>
           <a:srgbClr val="FAFAF7"/>
         </a:solidFill>
-        <a:effectLst/>
       </p:bgPr>
     </p:bg>
     <p:spTree>
@@ -4325,14 +4604,14 @@
       </p:sp>
       <p:pic>
         <p:nvPicPr>
-          <p:cNvPr id="3" name="Image 0" descr="preencoded.png"/>
+          <p:cNvPr id="3" name="Image 0" descr="preencoded.png">    </p:cNvPr>
           <p:cNvPicPr>
             <a:picLocks noChangeAspect="1"/>
           </p:cNvPicPr>
           <p:nvPr/>
         </p:nvPicPr>
         <p:blipFill>
-          <a:blip r:embed="rId3"/>
+          <a:blip r:embed="rId1"/>
           <a:stretch>
             <a:fillRect/>
           </a:stretch>
@@ -4368,7 +4647,7 @@
           <a:bodyPr wrap="square" rtlCol="0" anchor="ctr"/>
           <a:lstStyle/>
           <a:p>
-            <a:pPr marL="0" indent="0">
+            <a:pPr indent="0" marL="0">
               <a:buNone/>
             </a:pPr>
             <a:r>
@@ -4407,7 +4686,7 @@
           <a:bodyPr wrap="square" rtlCol="0" anchor="ctr"/>
           <a:lstStyle/>
           <a:p>
-            <a:pPr marL="0" indent="0">
+            <a:pPr indent="0" marL="0">
               <a:buNone/>
             </a:pPr>
             <a:r>
@@ -4446,7 +4725,7 @@
           </a:solidFill>
           <a:ln/>
           <a:effectLst>
-            <a:outerShdw blurRad="63500" dist="25400" dir="5400000" algn="bl" rotWithShape="0">
+            <a:outerShdw sx="100000" sy="100000" kx="0" ky="0" algn="bl" rotWithShape="0" blurRad="63500" dist="25400" dir="5400000">
               <a:srgbClr val="000000">
                 <a:alpha val="8000"/>
               </a:srgbClr>
@@ -4475,7 +4754,7 @@
           <a:bodyPr wrap="square" rtlCol="0" anchor="ctr"/>
           <a:lstStyle/>
           <a:p>
-            <a:pPr marL="0" indent="0">
+            <a:pPr indent="0" marL="0">
               <a:buNone/>
             </a:pPr>
             <a:r>
@@ -4514,7 +4793,7 @@
           <a:bodyPr wrap="square" rtlCol="0" anchor="ctr"/>
           <a:lstStyle/>
           <a:p>
-            <a:pPr marL="0" indent="0">
+            <a:pPr indent="0" marL="0">
               <a:buNone/>
             </a:pPr>
             <a:r>
@@ -4575,7 +4854,7 @@
           <a:bodyPr wrap="square" rtlCol="0" anchor="ctr"/>
           <a:lstStyle/>
           <a:p>
-            <a:pPr marL="0" indent="0">
+            <a:pPr indent="0" marL="0">
               <a:buNone/>
             </a:pPr>
             <a:r>
@@ -4614,7 +4893,7 @@
           <a:bodyPr wrap="square" rtlCol="0" anchor="ctr"/>
           <a:lstStyle/>
           <a:p>
-            <a:pPr marL="0" indent="0">
+            <a:pPr indent="0" marL="0">
               <a:buNone/>
             </a:pPr>
             <a:r>
@@ -4653,7 +4932,7 @@
           <a:bodyPr wrap="square" rtlCol="0" anchor="ctr"/>
           <a:lstStyle/>
           <a:p>
-            <a:pPr marL="0" indent="0">
+            <a:pPr indent="0" marL="0">
               <a:buNone/>
             </a:pPr>
             <a:r>
@@ -4692,7 +4971,7 @@
           <a:bodyPr wrap="square" rtlCol="0" anchor="ctr"/>
           <a:lstStyle/>
           <a:p>
-            <a:pPr marL="0" indent="0">
+            <a:pPr indent="0" marL="0">
               <a:buNone/>
             </a:pPr>
             <a:r>
@@ -4726,7 +5005,6 @@
         <a:solidFill>
           <a:srgbClr val="14213D"/>
         </a:solidFill>
-        <a:effectLst/>
       </p:bgPr>
     </p:bg>
     <p:spTree>
@@ -4765,14 +5043,14 @@
       </p:sp>
       <p:pic>
         <p:nvPicPr>
-          <p:cNvPr id="3" name="Image 0" descr="preencoded.png"/>
+          <p:cNvPr id="3" name="Image 0" descr="preencoded.png">    </p:cNvPr>
           <p:cNvPicPr>
             <a:picLocks noChangeAspect="1"/>
           </p:cNvPicPr>
           <p:nvPr/>
         </p:nvPicPr>
         <p:blipFill>
-          <a:blip r:embed="rId3"/>
+          <a:blip r:embed="rId1"/>
           <a:stretch>
             <a:fillRect/>
           </a:stretch>
@@ -4808,7 +5086,7 @@
           <a:bodyPr wrap="square" rtlCol="0" anchor="ctr"/>
           <a:lstStyle/>
           <a:p>
-            <a:pPr marL="0" indent="0">
+            <a:pPr indent="0" marL="0">
               <a:buNone/>
             </a:pPr>
             <a:r>
@@ -4847,7 +5125,7 @@
           <a:bodyPr wrap="square" rtlCol="0" anchor="ctr"/>
           <a:lstStyle/>
           <a:p>
-            <a:pPr marL="0" indent="0">
+            <a:pPr indent="0" marL="0">
               <a:buNone/>
             </a:pPr>
             <a:r>
@@ -4906,7 +5184,7 @@
           <a:bodyPr wrap="square" rtlCol="0" anchor="ctr"/>
           <a:lstStyle/>
           <a:p>
-            <a:pPr marL="0" indent="0" algn="ctr">
+            <a:pPr algn="ctr" indent="0" marL="0">
               <a:buNone/>
             </a:pPr>
             <a:r>
@@ -4945,7 +5223,7 @@
           <a:bodyPr wrap="square" rtlCol="0" anchor="ctr"/>
           <a:lstStyle/>
           <a:p>
-            <a:pPr marL="0" indent="0">
+            <a:pPr indent="0" marL="0">
               <a:buNone/>
             </a:pPr>
             <a:r>
@@ -5004,7 +5282,7 @@
           <a:bodyPr wrap="square" rtlCol="0" anchor="ctr"/>
           <a:lstStyle/>
           <a:p>
-            <a:pPr marL="0" indent="0" algn="ctr">
+            <a:pPr algn="ctr" indent="0" marL="0">
               <a:buNone/>
             </a:pPr>
             <a:r>
@@ -5043,7 +5321,7 @@
           <a:bodyPr wrap="square" rtlCol="0" anchor="ctr"/>
           <a:lstStyle/>
           <a:p>
-            <a:pPr marL="0" indent="0">
+            <a:pPr indent="0" marL="0">
               <a:buNone/>
             </a:pPr>
             <a:r>
@@ -5102,7 +5380,7 @@
           <a:bodyPr wrap="square" rtlCol="0" anchor="ctr"/>
           <a:lstStyle/>
           <a:p>
-            <a:pPr marL="0" indent="0" algn="ctr">
+            <a:pPr algn="ctr" indent="0" marL="0">
               <a:buNone/>
             </a:pPr>
             <a:r>
@@ -5141,7 +5419,7 @@
           <a:bodyPr wrap="square" rtlCol="0" anchor="ctr"/>
           <a:lstStyle/>
           <a:p>
-            <a:pPr marL="0" indent="0">
+            <a:pPr indent="0" marL="0">
               <a:buNone/>
             </a:pPr>
             <a:r>
@@ -5200,7 +5478,7 @@
           <a:bodyPr wrap="square" rtlCol="0" anchor="ctr"/>
           <a:lstStyle/>
           <a:p>
-            <a:pPr marL="0" indent="0" algn="ctr">
+            <a:pPr algn="ctr" indent="0" marL="0">
               <a:buNone/>
             </a:pPr>
             <a:r>
@@ -5239,7 +5517,7 @@
           <a:bodyPr wrap="square" rtlCol="0" anchor="ctr"/>
           <a:lstStyle/>
           <a:p>
-            <a:pPr marL="0" indent="0">
+            <a:pPr indent="0" marL="0">
               <a:buNone/>
             </a:pPr>
             <a:r>
@@ -5298,7 +5576,7 @@
           <a:bodyPr wrap="square" rtlCol="0" anchor="ctr"/>
           <a:lstStyle/>
           <a:p>
-            <a:pPr marL="0" indent="0" algn="ctr">
+            <a:pPr algn="ctr" indent="0" marL="0">
               <a:buNone/>
             </a:pPr>
             <a:r>
@@ -5337,7 +5615,7 @@
           <a:bodyPr wrap="square" rtlCol="0" anchor="ctr"/>
           <a:lstStyle/>
           <a:p>
-            <a:pPr marL="0" indent="0">
+            <a:pPr indent="0" marL="0">
               <a:buNone/>
             </a:pPr>
             <a:r>
@@ -5376,7 +5654,7 @@
           <a:bodyPr wrap="square" rtlCol="0" anchor="ctr"/>
           <a:lstStyle/>
           <a:p>
-            <a:pPr marL="0" indent="0">
+            <a:pPr indent="0" marL="0">
               <a:buNone/>
             </a:pPr>
             <a:r>
@@ -5410,7 +5688,6 @@
         <a:solidFill>
           <a:srgbClr val="FAFAF7"/>
         </a:solidFill>
-        <a:effectLst/>
       </p:bgPr>
     </p:bg>
     <p:spTree>
@@ -5448,7 +5725,7 @@
           <a:bodyPr wrap="square" rtlCol="0" anchor="ctr"/>
           <a:lstStyle/>
           <a:p>
-            <a:pPr marL="0" indent="0">
+            <a:pPr indent="0" marL="0">
               <a:buNone/>
             </a:pPr>
             <a:r>
@@ -5487,7 +5764,7 @@
           <a:bodyPr wrap="square" rtlCol="0" anchor="ctr"/>
           <a:lstStyle/>
           <a:p>
-            <a:pPr marL="0" indent="0">
+            <a:pPr indent="0" marL="0">
               <a:buNone/>
             </a:pPr>
             <a:r>
@@ -5526,7 +5803,7 @@
           </a:solidFill>
           <a:ln/>
           <a:effectLst>
-            <a:outerShdw blurRad="63500" dist="25400" dir="5400000" algn="bl" rotWithShape="0">
+            <a:outerShdw sx="100000" sy="100000" kx="0" ky="0" algn="bl" rotWithShape="0" blurRad="63500" dist="25400" dir="5400000">
               <a:srgbClr val="000000">
                 <a:alpha val="7000"/>
               </a:srgbClr>
@@ -5575,7 +5852,7 @@
           <a:bodyPr wrap="square" rtlCol="0" anchor="ctr"/>
           <a:lstStyle/>
           <a:p>
-            <a:pPr marL="0" indent="0" algn="ctr">
+            <a:pPr algn="ctr" indent="0" marL="0">
               <a:buNone/>
             </a:pPr>
             <a:r>
@@ -5614,7 +5891,7 @@
           <a:bodyPr wrap="square" rtlCol="0" anchor="ctr"/>
           <a:lstStyle/>
           <a:p>
-            <a:pPr marL="0" indent="0">
+            <a:pPr indent="0" marL="0">
               <a:buNone/>
             </a:pPr>
             <a:r>
@@ -5653,7 +5930,7 @@
           </a:solidFill>
           <a:ln/>
           <a:effectLst>
-            <a:outerShdw blurRad="63500" dist="25400" dir="5400000" algn="bl" rotWithShape="0">
+            <a:outerShdw sx="100000" sy="100000" kx="0" ky="0" algn="bl" rotWithShape="0" blurRad="63500" dist="25400" dir="5400000">
               <a:srgbClr val="000000">
                 <a:alpha val="7000"/>
               </a:srgbClr>
@@ -5702,7 +5979,7 @@
           <a:bodyPr wrap="square" rtlCol="0" anchor="ctr"/>
           <a:lstStyle/>
           <a:p>
-            <a:pPr marL="0" indent="0" algn="ctr">
+            <a:pPr algn="ctr" indent="0" marL="0">
               <a:buNone/>
             </a:pPr>
             <a:r>
@@ -5741,7 +6018,7 @@
           <a:bodyPr wrap="square" rtlCol="0" anchor="ctr"/>
           <a:lstStyle/>
           <a:p>
-            <a:pPr marL="0" indent="0">
+            <a:pPr indent="0" marL="0">
               <a:buNone/>
             </a:pPr>
             <a:r>
@@ -5780,7 +6057,7 @@
           </a:solidFill>
           <a:ln/>
           <a:effectLst>
-            <a:outerShdw blurRad="63500" dist="25400" dir="5400000" algn="bl" rotWithShape="0">
+            <a:outerShdw sx="100000" sy="100000" kx="0" ky="0" algn="bl" rotWithShape="0" blurRad="63500" dist="25400" dir="5400000">
               <a:srgbClr val="000000">
                 <a:alpha val="7000"/>
               </a:srgbClr>
@@ -5829,7 +6106,7 @@
           <a:bodyPr wrap="square" rtlCol="0" anchor="ctr"/>
           <a:lstStyle/>
           <a:p>
-            <a:pPr marL="0" indent="0" algn="ctr">
+            <a:pPr algn="ctr" indent="0" marL="0">
               <a:buNone/>
             </a:pPr>
             <a:r>
@@ -5868,7 +6145,7 @@
           <a:bodyPr wrap="square" rtlCol="0" anchor="ctr"/>
           <a:lstStyle/>
           <a:p>
-            <a:pPr marL="0" indent="0">
+            <a:pPr indent="0" marL="0">
               <a:buNone/>
             </a:pPr>
             <a:r>
@@ -5907,7 +6184,7 @@
           </a:solidFill>
           <a:ln/>
           <a:effectLst>
-            <a:outerShdw blurRad="63500" dist="25400" dir="5400000" algn="bl" rotWithShape="0">
+            <a:outerShdw sx="100000" sy="100000" kx="0" ky="0" algn="bl" rotWithShape="0" blurRad="63500" dist="25400" dir="5400000">
               <a:srgbClr val="000000">
                 <a:alpha val="7000"/>
               </a:srgbClr>
@@ -5956,7 +6233,7 @@
           <a:bodyPr wrap="square" rtlCol="0" anchor="ctr"/>
           <a:lstStyle/>
           <a:p>
-            <a:pPr marL="0" indent="0" algn="ctr">
+            <a:pPr algn="ctr" indent="0" marL="0">
               <a:buNone/>
             </a:pPr>
             <a:r>
@@ -5995,7 +6272,7 @@
           <a:bodyPr wrap="square" rtlCol="0" anchor="ctr"/>
           <a:lstStyle/>
           <a:p>
-            <a:pPr marL="0" indent="0">
+            <a:pPr indent="0" marL="0">
               <a:buNone/>
             </a:pPr>
             <a:r>
@@ -6034,7 +6311,7 @@
           <a:bodyPr wrap="square" rtlCol="0" anchor="ctr"/>
           <a:lstStyle/>
           <a:p>
-            <a:pPr marL="0" indent="0">
+            <a:pPr indent="0" marL="0">
               <a:buNone/>
             </a:pPr>
             <a:r>
@@ -6068,7 +6345,6 @@
         <a:solidFill>
           <a:srgbClr val="14213D"/>
         </a:solidFill>
-        <a:effectLst/>
       </p:bgPr>
     </p:bg>
     <p:spTree>
@@ -6107,14 +6383,14 @@
       </p:sp>
       <p:pic>
         <p:nvPicPr>
-          <p:cNvPr id="3" name="Image 0" descr="preencoded.png"/>
+          <p:cNvPr id="3" name="Image 0" descr="preencoded.png">    </p:cNvPr>
           <p:cNvPicPr>
             <a:picLocks noChangeAspect="1"/>
           </p:cNvPicPr>
           <p:nvPr/>
         </p:nvPicPr>
         <p:blipFill>
-          <a:blip r:embed="rId3"/>
+          <a:blip r:embed="rId1"/>
           <a:stretch>
             <a:fillRect/>
           </a:stretch>
@@ -6150,7 +6426,7 @@
           <a:bodyPr wrap="square" rtlCol="0" anchor="ctr"/>
           <a:lstStyle/>
           <a:p>
-            <a:pPr marL="0" indent="0">
+            <a:pPr indent="0" marL="0">
               <a:buNone/>
             </a:pPr>
             <a:r>
@@ -6209,7 +6485,7 @@
           <a:bodyPr wrap="square" rtlCol="0" anchor="ctr"/>
           <a:lstStyle/>
           <a:p>
-            <a:pPr marL="0" indent="0">
+            <a:pPr indent="0" marL="0">
               <a:buNone/>
             </a:pPr>
             <a:r>
@@ -6268,7 +6544,7 @@
           <a:bodyPr wrap="square" rtlCol="0" anchor="ctr"/>
           <a:lstStyle/>
           <a:p>
-            <a:pPr marL="0" indent="0">
+            <a:pPr indent="0" marL="0">
               <a:buNone/>
             </a:pPr>
             <a:r>
@@ -6327,7 +6603,7 @@
           <a:bodyPr wrap="square" rtlCol="0" anchor="ctr"/>
           <a:lstStyle/>
           <a:p>
-            <a:pPr marL="0" indent="0">
+            <a:pPr indent="0" marL="0">
               <a:buNone/>
             </a:pPr>
             <a:r>
@@ -6386,7 +6662,7 @@
           <a:bodyPr wrap="square" rtlCol="0" anchor="ctr"/>
           <a:lstStyle/>
           <a:p>
-            <a:pPr marL="0" indent="0">
+            <a:pPr indent="0" marL="0">
               <a:buNone/>
             </a:pPr>
             <a:r>
@@ -6425,7 +6701,7 @@
           <a:bodyPr wrap="square" rtlCol="0" anchor="ctr"/>
           <a:lstStyle/>
           <a:p>
-            <a:pPr marL="0" indent="0">
+            <a:pPr indent="0" marL="0">
               <a:buNone/>
             </a:pPr>
             <a:r>
@@ -6459,7 +6735,6 @@
         <a:solidFill>
           <a:srgbClr val="FAFAF7"/>
         </a:solidFill>
-        <a:effectLst/>
       </p:bgPr>
     </p:bg>
     <p:spTree>
@@ -6497,7 +6772,7 @@
           <a:bodyPr wrap="square" rtlCol="0" anchor="ctr"/>
           <a:lstStyle/>
           <a:p>
-            <a:pPr marL="0" indent="0">
+            <a:pPr indent="0" marL="0">
               <a:buNone/>
             </a:pPr>
             <a:r>
@@ -6523,12 +6798,12 @@
         </p:nvSpPr>
         <p:spPr>
           <a:xfrm>
-            <a:off x="548640" y="1234440"/>
-            <a:ext cx="5349240" cy="3566160"/>
+            <a:off x="548640" y="1188720"/>
+            <a:ext cx="5349240" cy="2468880"/>
           </a:xfrm>
           <a:prstGeom prst="roundRect">
             <a:avLst>
-              <a:gd name="adj" fmla="val 2051"/>
+              <a:gd name="adj" fmla="val 2963"/>
             </a:avLst>
           </a:prstGeom>
           <a:solidFill>
@@ -6536,7 +6811,7 @@
           </a:solidFill>
           <a:ln/>
           <a:effectLst>
-            <a:outerShdw blurRad="63500" dist="25400" dir="5400000" algn="bl" rotWithShape="0">
+            <a:outerShdw sx="100000" sy="100000" kx="0" ky="0" algn="bl" rotWithShape="0" blurRad="63500" dist="25400" dir="5400000">
               <a:srgbClr val="000000">
                 <a:alpha val="8000"/>
               </a:srgbClr>
@@ -6552,7 +6827,7 @@
         </p:nvSpPr>
         <p:spPr>
           <a:xfrm>
-            <a:off x="822960" y="1417320"/>
+            <a:off x="822960" y="1371600"/>
             <a:ext cx="4846320" cy="365760"/>
           </a:xfrm>
           <a:prstGeom prst="rect">
@@ -6565,7 +6840,7 @@
           <a:bodyPr wrap="square" rtlCol="0" anchor="ctr"/>
           <a:lstStyle/>
           <a:p>
-            <a:pPr marL="0" indent="0">
+            <a:pPr indent="0" marL="0">
               <a:buNone/>
             </a:pPr>
             <a:r>
@@ -6591,24 +6866,24 @@
         </p:nvSpPr>
         <p:spPr>
           <a:xfrm>
-            <a:off x="822960" y="1828800"/>
-            <a:ext cx="4846320" cy="1188720"/>
-          </a:xfrm>
-          <a:prstGeom prst="rect">
-            <a:avLst/>
-          </a:prstGeom>
-          <a:noFill/>
-          <a:ln/>
-        </p:spPr>
-        <p:txBody>
-          <a:bodyPr wrap="square" rtlCol="0" anchor="ctr"/>
-          <a:lstStyle/>
-          <a:p>
-            <a:pPr marL="0" indent="0">
-              <a:buNone/>
-            </a:pPr>
-            <a:r>
-              <a:rPr lang="en-US" sz="1300" dirty="0">
+            <a:off x="822960" y="1783080"/>
+            <a:ext cx="4846320" cy="1097280"/>
+          </a:xfrm>
+          <a:prstGeom prst="rect">
+            <a:avLst/>
+          </a:prstGeom>
+          <a:noFill/>
+          <a:ln/>
+        </p:spPr>
+        <p:txBody>
+          <a:bodyPr wrap="square" rtlCol="0" anchor="ctr"/>
+          <a:lstStyle/>
+          <a:p>
+            <a:pPr indent="0" marL="0">
+              <a:buNone/>
+            </a:pPr>
+            <a:r>
+              <a:rPr lang="en-US" sz="1250" dirty="0">
                 <a:solidFill>
                   <a:srgbClr val="3A3F4B"/>
                 </a:solidFill>
@@ -6618,7 +6893,7 @@
               </a:rPr>
               <a:t>An index between 0 and 100, comparing average gains to average losses over a window, typically 14 periods. Below 30 is read as oversold. Above 70 is read as overbought.</a:t>
             </a:r>
-            <a:endParaRPr lang="en-US" sz="1300" dirty="0"/>
+            <a:endParaRPr lang="en-US" sz="1250" dirty="0"/>
           </a:p>
         </p:txBody>
       </p:sp>
@@ -6630,24 +6905,24 @@
         </p:nvSpPr>
         <p:spPr>
           <a:xfrm>
-            <a:off x="822960" y="3108960"/>
-            <a:ext cx="4846320" cy="731520"/>
-          </a:xfrm>
-          <a:prstGeom prst="rect">
-            <a:avLst/>
-          </a:prstGeom>
-          <a:noFill/>
-          <a:ln/>
-        </p:spPr>
-        <p:txBody>
-          <a:bodyPr wrap="square" rtlCol="0" anchor="ctr"/>
-          <a:lstStyle/>
-          <a:p>
-            <a:pPr marL="0" indent="0">
-              <a:buNone/>
-            </a:pPr>
-            <a:r>
-              <a:rPr lang="en-US" sz="1300" dirty="0">
+            <a:off x="822960" y="2926080"/>
+            <a:ext cx="4846320" cy="685800"/>
+          </a:xfrm>
+          <a:prstGeom prst="rect">
+            <a:avLst/>
+          </a:prstGeom>
+          <a:noFill/>
+          <a:ln/>
+        </p:spPr>
+        <p:txBody>
+          <a:bodyPr wrap="square" rtlCol="0" anchor="ctr"/>
+          <a:lstStyle/>
+          <a:p>
+            <a:pPr indent="0" marL="0">
+              <a:buNone/>
+            </a:pPr>
+            <a:r>
+              <a:rPr lang="en-US" sz="1250" dirty="0">
                 <a:solidFill>
                   <a:srgbClr val="14213D"/>
                 </a:solidFill>
@@ -6657,14 +6932,14 @@
               </a:rPr>
               <a:t>RS = Avg Gain / Avg Loss</a:t>
             </a:r>
-            <a:endParaRPr lang="en-US" sz="1300" dirty="0"/>
-          </a:p>
-          <a:p>
-            <a:pPr marL="0" indent="0">
-              <a:buNone/>
-            </a:pPr>
-            <a:r>
-              <a:rPr lang="en-US" sz="1300" dirty="0">
+            <a:endParaRPr lang="en-US" sz="1250" dirty="0"/>
+          </a:p>
+          <a:p>
+            <a:pPr indent="0" marL="0">
+              <a:buNone/>
+            </a:pPr>
+            <a:r>
+              <a:rPr lang="en-US" sz="1250" dirty="0">
                 <a:solidFill>
                   <a:srgbClr val="14213D"/>
                 </a:solidFill>
@@ -6674,64 +6949,201 @@
               </a:rPr>
               <a:t>RSI = 100 minus (100 divided by 1 plus RS)</a:t>
             </a:r>
-            <a:endParaRPr lang="en-US" sz="1300" dirty="0"/>
-          </a:p>
-        </p:txBody>
-      </p:sp>
-      <p:sp>
-        <p:nvSpPr>
-          <p:cNvPr id="7" name="Text 5"/>
-          <p:cNvSpPr/>
-          <p:nvPr/>
-        </p:nvSpPr>
-        <p:spPr>
-          <a:xfrm>
-            <a:off x="822960" y="3931920"/>
-            <a:ext cx="4846320" cy="640080"/>
-          </a:xfrm>
-          <a:prstGeom prst="rect">
-            <a:avLst/>
-          </a:prstGeom>
-          <a:noFill/>
-          <a:ln/>
-        </p:spPr>
-        <p:txBody>
-          <a:bodyPr wrap="square" rtlCol="0" anchor="ctr"/>
-          <a:lstStyle/>
-          <a:p>
-            <a:pPr marL="0" indent="0">
-              <a:buNone/>
-            </a:pPr>
-            <a:r>
-              <a:rPr lang="en-US" sz="1150" i="1" dirty="0">
-                <a:solidFill>
-                  <a:srgbClr val="8A8577"/>
+            <a:endParaRPr lang="en-US" sz="1250" dirty="0"/>
+          </a:p>
+        </p:txBody>
+      </p:sp>
+      <p:sp>
+        <p:nvSpPr>
+          <p:cNvPr id="7" name="Shape 5"/>
+          <p:cNvSpPr/>
+          <p:nvPr/>
+        </p:nvSpPr>
+        <p:spPr>
+          <a:xfrm>
+            <a:off x="6172200" y="1188720"/>
+            <a:ext cx="5440680" cy="2468880"/>
+          </a:xfrm>
+          <a:prstGeom prst="roundRect">
+            <a:avLst>
+              <a:gd name="adj" fmla="val 2963"/>
+            </a:avLst>
+          </a:prstGeom>
+          <a:solidFill>
+            <a:srgbClr val="14213D"/>
+          </a:solidFill>
+          <a:ln/>
+        </p:spPr>
+      </p:sp>
+      <p:sp>
+        <p:nvSpPr>
+          <p:cNvPr id="8" name="Text 6"/>
+          <p:cNvSpPr/>
+          <p:nvPr/>
+        </p:nvSpPr>
+        <p:spPr>
+          <a:xfrm>
+            <a:off x="6446520" y="1371600"/>
+            <a:ext cx="4937760" cy="365760"/>
+          </a:xfrm>
+          <a:prstGeom prst="rect">
+            <a:avLst/>
+          </a:prstGeom>
+          <a:noFill/>
+          <a:ln/>
+        </p:spPr>
+        <p:txBody>
+          <a:bodyPr wrap="square" rtlCol="0" anchor="ctr"/>
+          <a:lstStyle/>
+          <a:p>
+            <a:pPr indent="0" marL="0">
+              <a:buNone/>
+            </a:pPr>
+            <a:r>
+              <a:rPr lang="en-US" sz="1500" b="1" dirty="0">
+                <a:solidFill>
+                  <a:srgbClr val="9A6B2C"/>
+                </a:solidFill>
+                <a:latin typeface="Cambria" pitchFamily="34" charset="0"/>
+                <a:ea typeface="Cambria" pitchFamily="34" charset="-122"/>
+                <a:cs typeface="Cambria" pitchFamily="34" charset="-120"/>
+              </a:rPr>
+              <a:t>Why the window size matters</a:t>
+            </a:r>
+            <a:endParaRPr lang="en-US" sz="1500" dirty="0"/>
+          </a:p>
+        </p:txBody>
+      </p:sp>
+      <p:sp>
+        <p:nvSpPr>
+          <p:cNvPr id="9" name="Text 7"/>
+          <p:cNvSpPr/>
+          <p:nvPr/>
+        </p:nvSpPr>
+        <p:spPr>
+          <a:xfrm>
+            <a:off x="6446520" y="1783080"/>
+            <a:ext cx="4937760" cy="1188720"/>
+          </a:xfrm>
+          <a:prstGeom prst="rect">
+            <a:avLst/>
+          </a:prstGeom>
+          <a:noFill/>
+          <a:ln/>
+        </p:spPr>
+        <p:txBody>
+          <a:bodyPr wrap="square" rtlCol="0" anchor="ctr"/>
+          <a:lstStyle/>
+          <a:p>
+            <a:pPr indent="0" marL="0">
+              <a:buNone/>
+            </a:pPr>
+            <a:r>
+              <a:rPr lang="en-US" sz="1250" dirty="0">
+                <a:solidFill>
+                  <a:srgbClr val="E4E9F5"/>
                 </a:solidFill>
                 <a:latin typeface="Calibri" pitchFamily="34" charset="0"/>
                 <a:ea typeface="Calibri" pitchFamily="34" charset="-122"/>
                 <a:cs typeface="Calibri" pitchFamily="34" charset="-120"/>
               </a:rPr>
+              <a:t>Avg Gain and Avg Loss both divide by the same window (n, typically 14), not by a separate count of up days or down days. That shared denominator is what keeps the ratio meaningful.</a:t>
+            </a:r>
+            <a:endParaRPr lang="en-US" sz="1250" dirty="0"/>
+          </a:p>
+        </p:txBody>
+      </p:sp>
+      <p:sp>
+        <p:nvSpPr>
+          <p:cNvPr id="10" name="Text 8"/>
+          <p:cNvSpPr/>
+          <p:nvPr/>
+        </p:nvSpPr>
+        <p:spPr>
+          <a:xfrm>
+            <a:off x="6446520" y="3017520"/>
+            <a:ext cx="4937760" cy="548640"/>
+          </a:xfrm>
+          <a:prstGeom prst="rect">
+            <a:avLst/>
+          </a:prstGeom>
+          <a:noFill/>
+          <a:ln/>
+        </p:spPr>
+        <p:txBody>
+          <a:bodyPr wrap="square" rtlCol="0" anchor="ctr"/>
+          <a:lstStyle/>
+          <a:p>
+            <a:pPr indent="0" marL="0">
+              <a:buNone/>
+            </a:pPr>
+            <a:r>
+              <a:rPr lang="en-US" sz="1100" i="1" dirty="0">
+                <a:solidFill>
+                  <a:srgbClr val="CADCFC"/>
+                </a:solidFill>
+                <a:latin typeface="Calibri" pitchFamily="34" charset="0"/>
+                <a:ea typeface="Calibri" pitchFamily="34" charset="-122"/>
+                <a:cs typeface="Calibri" pitchFamily="34" charset="-120"/>
+              </a:rPr>
               <a:t>We use SMA for this calculation, matching the scripts. EMA is more common in practice.</a:t>
             </a:r>
-            <a:endParaRPr lang="en-US" sz="1150" dirty="0"/>
-          </a:p>
-        </p:txBody>
-      </p:sp>
-      <p:sp>
-        <p:nvSpPr>
-          <p:cNvPr id="8" name="Shape 6"/>
-          <p:cNvSpPr/>
-          <p:nvPr/>
-        </p:nvSpPr>
-        <p:spPr>
-          <a:xfrm>
-            <a:off x="6172200" y="1234440"/>
-            <a:ext cx="5440680" cy="3566160"/>
-          </a:xfrm>
-          <a:prstGeom prst="roundRect">
-            <a:avLst>
-              <a:gd name="adj" fmla="val 2051"/>
-            </a:avLst>
+            <a:endParaRPr lang="en-US" sz="1100" dirty="0"/>
+          </a:p>
+        </p:txBody>
+      </p:sp>
+      <p:sp>
+        <p:nvSpPr>
+          <p:cNvPr id="11" name="Text 9"/>
+          <p:cNvSpPr/>
+          <p:nvPr/>
+        </p:nvSpPr>
+        <p:spPr>
+          <a:xfrm>
+            <a:off x="548640" y="3840480"/>
+            <a:ext cx="7315200" cy="365760"/>
+          </a:xfrm>
+          <a:prstGeom prst="rect">
+            <a:avLst/>
+          </a:prstGeom>
+          <a:noFill/>
+          <a:ln/>
+        </p:spPr>
+        <p:txBody>
+          <a:bodyPr wrap="square" rtlCol="0" anchor="ctr"/>
+          <a:lstStyle/>
+          <a:p>
+            <a:pPr indent="0" marL="0">
+              <a:buNone/>
+            </a:pPr>
+            <a:r>
+              <a:rPr lang="en-US" sz="1500" b="1" dirty="0">
+                <a:solidFill>
+                  <a:srgbClr val="14213D"/>
+                </a:solidFill>
+                <a:latin typeface="Cambria" pitchFamily="34" charset="0"/>
+                <a:ea typeface="Cambria" pitchFamily="34" charset="-122"/>
+                <a:cs typeface="Cambria" pitchFamily="34" charset="-120"/>
+              </a:rPr>
+              <a:t>Worked example, n = 14 throughout</a:t>
+            </a:r>
+            <a:endParaRPr lang="en-US" sz="1500" dirty="0"/>
+          </a:p>
+        </p:txBody>
+      </p:sp>
+      <p:sp>
+        <p:nvSpPr>
+          <p:cNvPr id="12" name="Shape 10"/>
+          <p:cNvSpPr/>
+          <p:nvPr/>
+        </p:nvSpPr>
+        <p:spPr>
+          <a:xfrm>
+            <a:off x="548640" y="4251960"/>
+            <a:ext cx="10972800" cy="384048"/>
+          </a:xfrm>
+          <a:prstGeom prst="rect">
+            <a:avLst/>
           </a:prstGeom>
           <a:solidFill>
             <a:srgbClr val="14213D"/>
@@ -6741,116 +7153,155 @@
       </p:sp>
       <p:sp>
         <p:nvSpPr>
-          <p:cNvPr id="9" name="Text 7"/>
-          <p:cNvSpPr/>
-          <p:nvPr/>
-        </p:nvSpPr>
-        <p:spPr>
-          <a:xfrm>
-            <a:off x="6446520" y="1417320"/>
-            <a:ext cx="4937760" cy="365760"/>
-          </a:xfrm>
-          <a:prstGeom prst="rect">
-            <a:avLst/>
-          </a:prstGeom>
-          <a:noFill/>
-          <a:ln/>
-        </p:spPr>
-        <p:txBody>
-          <a:bodyPr wrap="square" rtlCol="0" anchor="ctr"/>
-          <a:lstStyle/>
-          <a:p>
-            <a:pPr marL="0" indent="0">
-              <a:buNone/>
-            </a:pPr>
-            <a:r>
-              <a:rPr lang="en-US" sz="1500" b="1" dirty="0">
-                <a:solidFill>
-                  <a:srgbClr val="9A6B2C"/>
-                </a:solidFill>
-                <a:latin typeface="Cambria" pitchFamily="34" charset="0"/>
-                <a:ea typeface="Cambria" pitchFamily="34" charset="-122"/>
-                <a:cs typeface="Cambria" pitchFamily="34" charset="-120"/>
-              </a:rPr>
-              <a:t>Worked example</a:t>
-            </a:r>
-            <a:endParaRPr lang="en-US" sz="1500" dirty="0"/>
-          </a:p>
-        </p:txBody>
-      </p:sp>
-      <p:sp>
-        <p:nvSpPr>
-          <p:cNvPr id="10" name="Text 8"/>
-          <p:cNvSpPr/>
-          <p:nvPr/>
-        </p:nvSpPr>
-        <p:spPr>
-          <a:xfrm>
-            <a:off x="6446520" y="1874520"/>
-            <a:ext cx="1645920" cy="502920"/>
-          </a:xfrm>
-          <a:prstGeom prst="rect">
-            <a:avLst/>
-          </a:prstGeom>
-          <a:noFill/>
-          <a:ln/>
-        </p:spPr>
-        <p:txBody>
-          <a:bodyPr wrap="square" rtlCol="0" anchor="ctr"/>
-          <a:lstStyle/>
-          <a:p>
-            <a:pPr marL="0" indent="0">
-              <a:buNone/>
-            </a:pPr>
-            <a:r>
-              <a:rPr lang="en-US" sz="1300" b="1" dirty="0">
-                <a:solidFill>
-                  <a:srgbClr val="E4E9F5"/>
+          <p:cNvPr id="13" name="Text 11"/>
+          <p:cNvSpPr/>
+          <p:nvPr/>
+        </p:nvSpPr>
+        <p:spPr>
+          <a:xfrm>
+            <a:off x="685800" y="4251960"/>
+            <a:ext cx="2011680" cy="384048"/>
+          </a:xfrm>
+          <a:prstGeom prst="rect">
+            <a:avLst/>
+          </a:prstGeom>
+          <a:noFill/>
+          <a:ln/>
+        </p:spPr>
+        <p:txBody>
+          <a:bodyPr wrap="square" rtlCol="0" anchor="ctr"/>
+          <a:lstStyle/>
+          <a:p>
+            <a:pPr indent="0" marL="0">
+              <a:buNone/>
+            </a:pPr>
+            <a:r>
+              <a:rPr lang="en-US" sz="1250" b="1" dirty="0">
+                <a:solidFill>
+                  <a:srgbClr val="FFFFFF"/>
                 </a:solidFill>
                 <a:latin typeface="Calibri" pitchFamily="34" charset="0"/>
                 <a:ea typeface="Calibri" pitchFamily="34" charset="-122"/>
                 <a:cs typeface="Calibri" pitchFamily="34" charset="-120"/>
               </a:rPr>
-              <a:t>Neutral</a:t>
-            </a:r>
-            <a:endParaRPr lang="en-US" sz="1300" dirty="0"/>
-          </a:p>
-        </p:txBody>
-      </p:sp>
-      <p:sp>
-        <p:nvSpPr>
-          <p:cNvPr id="11" name="Text 9"/>
-          <p:cNvSpPr/>
-          <p:nvPr/>
-        </p:nvSpPr>
-        <p:spPr>
-          <a:xfrm>
-            <a:off x="8092440" y="1874520"/>
-            <a:ext cx="1463040" cy="502920"/>
-          </a:xfrm>
-          <a:prstGeom prst="rect">
-            <a:avLst/>
-          </a:prstGeom>
-          <a:noFill/>
-          <a:ln/>
-        </p:spPr>
-        <p:txBody>
-          <a:bodyPr wrap="square" rtlCol="0" anchor="ctr"/>
-          <a:lstStyle/>
-          <a:p>
-            <a:pPr marL="0" indent="0">
-              <a:buNone/>
-            </a:pPr>
-            <a:r>
-              <a:rPr lang="en-US" sz="1250" dirty="0">
-                <a:solidFill>
-                  <a:srgbClr val="CADCFC"/>
+              <a:t>Case</a:t>
+            </a:r>
+            <a:endParaRPr lang="en-US" sz="1250" dirty="0"/>
+          </a:p>
+        </p:txBody>
+      </p:sp>
+      <p:sp>
+        <p:nvSpPr>
+          <p:cNvPr id="14" name="Text 12"/>
+          <p:cNvSpPr/>
+          <p:nvPr/>
+        </p:nvSpPr>
+        <p:spPr>
+          <a:xfrm>
+            <a:off x="2880360" y="4251960"/>
+            <a:ext cx="2011680" cy="384048"/>
+          </a:xfrm>
+          <a:prstGeom prst="rect">
+            <a:avLst/>
+          </a:prstGeom>
+          <a:noFill/>
+          <a:ln/>
+        </p:spPr>
+        <p:txBody>
+          <a:bodyPr wrap="square" rtlCol="0" anchor="ctr"/>
+          <a:lstStyle/>
+          <a:p>
+            <a:pPr indent="0" marL="0">
+              <a:buNone/>
+            </a:pPr>
+            <a:r>
+              <a:rPr lang="en-US" sz="1250" b="1" dirty="0">
+                <a:solidFill>
+                  <a:srgbClr val="FFFFFF"/>
+                </a:solidFill>
+                <a:latin typeface="Calibri" pitchFamily="34" charset="0"/>
+                <a:ea typeface="Calibri" pitchFamily="34" charset="-122"/>
+                <a:cs typeface="Calibri" pitchFamily="34" charset="-120"/>
+              </a:rPr>
+              <a:t>Total gain</a:t>
+            </a:r>
+            <a:endParaRPr lang="en-US" sz="1250" dirty="0"/>
+          </a:p>
+        </p:txBody>
+      </p:sp>
+      <p:sp>
+        <p:nvSpPr>
+          <p:cNvPr id="15" name="Text 13"/>
+          <p:cNvSpPr/>
+          <p:nvPr/>
+        </p:nvSpPr>
+        <p:spPr>
+          <a:xfrm>
+            <a:off x="5074920" y="4251960"/>
+            <a:ext cx="2011680" cy="384048"/>
+          </a:xfrm>
+          <a:prstGeom prst="rect">
+            <a:avLst/>
+          </a:prstGeom>
+          <a:noFill/>
+          <a:ln/>
+        </p:spPr>
+        <p:txBody>
+          <a:bodyPr wrap="square" rtlCol="0" anchor="ctr"/>
+          <a:lstStyle/>
+          <a:p>
+            <a:pPr indent="0" marL="0">
+              <a:buNone/>
+            </a:pPr>
+            <a:r>
+              <a:rPr lang="en-US" sz="1250" b="1" dirty="0">
+                <a:solidFill>
+                  <a:srgbClr val="FFFFFF"/>
+                </a:solidFill>
+                <a:latin typeface="Calibri" pitchFamily="34" charset="0"/>
+                <a:ea typeface="Calibri" pitchFamily="34" charset="-122"/>
+                <a:cs typeface="Calibri" pitchFamily="34" charset="-120"/>
+              </a:rPr>
+              <a:t>Total loss</a:t>
+            </a:r>
+            <a:endParaRPr lang="en-US" sz="1250" dirty="0"/>
+          </a:p>
+        </p:txBody>
+      </p:sp>
+      <p:sp>
+        <p:nvSpPr>
+          <p:cNvPr id="16" name="Text 14"/>
+          <p:cNvSpPr/>
+          <p:nvPr/>
+        </p:nvSpPr>
+        <p:spPr>
+          <a:xfrm>
+            <a:off x="7269480" y="4251960"/>
+            <a:ext cx="2011680" cy="384048"/>
+          </a:xfrm>
+          <a:prstGeom prst="rect">
+            <a:avLst/>
+          </a:prstGeom>
+          <a:noFill/>
+          <a:ln/>
+        </p:spPr>
+        <p:txBody>
+          <a:bodyPr wrap="square" rtlCol="0" anchor="ctr"/>
+          <a:lstStyle/>
+          <a:p>
+            <a:pPr indent="0" marL="0">
+              <a:buNone/>
+            </a:pPr>
+            <a:r>
+              <a:rPr lang="en-US" sz="1250" b="1" dirty="0">
+                <a:solidFill>
+                  <a:srgbClr val="FFFFFF"/>
                 </a:solidFill>
                 <a:latin typeface="Courier New" pitchFamily="34" charset="0"/>
                 <a:ea typeface="Courier New" pitchFamily="34" charset="-122"/>
                 <a:cs typeface="Courier New" pitchFamily="34" charset="-120"/>
               </a:rPr>
-              <a:t>RS = 1</a:t>
+              <a:t>RS</a:t>
             </a:r>
             <a:endParaRPr lang="en-US" sz="1250" dirty="0"/>
           </a:p>
@@ -6858,38 +7309,38 @@
       </p:sp>
       <p:sp>
         <p:nvSpPr>
-          <p:cNvPr id="12" name="Text 10"/>
-          <p:cNvSpPr/>
-          <p:nvPr/>
-        </p:nvSpPr>
-        <p:spPr>
-          <a:xfrm>
-            <a:off x="9555480" y="1874520"/>
-            <a:ext cx="1554480" cy="502920"/>
-          </a:xfrm>
-          <a:prstGeom prst="rect">
-            <a:avLst/>
-          </a:prstGeom>
-          <a:noFill/>
-          <a:ln/>
-        </p:spPr>
-        <p:txBody>
-          <a:bodyPr wrap="square" rtlCol="0" anchor="ctr"/>
-          <a:lstStyle/>
-          <a:p>
-            <a:pPr marL="0" indent="0">
+          <p:cNvPr id="17" name="Text 15"/>
+          <p:cNvSpPr/>
+          <p:nvPr/>
+        </p:nvSpPr>
+        <p:spPr>
+          <a:xfrm>
+            <a:off x="9464040" y="4251960"/>
+            <a:ext cx="2011680" cy="384048"/>
+          </a:xfrm>
+          <a:prstGeom prst="rect">
+            <a:avLst/>
+          </a:prstGeom>
+          <a:noFill/>
+          <a:ln/>
+        </p:spPr>
+        <p:txBody>
+          <a:bodyPr wrap="square" rtlCol="0" anchor="ctr"/>
+          <a:lstStyle/>
+          <a:p>
+            <a:pPr indent="0" marL="0">
               <a:buNone/>
             </a:pPr>
             <a:r>
               <a:rPr lang="en-US" sz="1250" b="1" dirty="0">
                 <a:solidFill>
-                  <a:srgbClr val="9A6B2C"/>
+                  <a:srgbClr val="FFFFFF"/>
                 </a:solidFill>
                 <a:latin typeface="Courier New" pitchFamily="34" charset="0"/>
                 <a:ea typeface="Courier New" pitchFamily="34" charset="-122"/>
                 <a:cs typeface="Courier New" pitchFamily="34" charset="-120"/>
               </a:rPr>
-              <a:t>RSI = 50</a:t>
+              <a:t>RSI</a:t>
             </a:r>
             <a:endParaRPr lang="en-US" sz="1250" dirty="0"/>
           </a:p>
@@ -6897,77 +7348,175 @@
       </p:sp>
       <p:sp>
         <p:nvSpPr>
-          <p:cNvPr id="13" name="Text 11"/>
-          <p:cNvSpPr/>
-          <p:nvPr/>
-        </p:nvSpPr>
-        <p:spPr>
-          <a:xfrm>
-            <a:off x="6446520" y="2496312"/>
-            <a:ext cx="1645920" cy="502920"/>
-          </a:xfrm>
-          <a:prstGeom prst="rect">
-            <a:avLst/>
-          </a:prstGeom>
-          <a:noFill/>
-          <a:ln/>
-        </p:spPr>
-        <p:txBody>
-          <a:bodyPr wrap="square" rtlCol="0" anchor="ctr"/>
-          <a:lstStyle/>
-          <a:p>
-            <a:pPr marL="0" indent="0">
-              <a:buNone/>
-            </a:pPr>
-            <a:r>
-              <a:rPr lang="en-US" sz="1300" b="1" dirty="0">
-                <a:solidFill>
-                  <a:srgbClr val="E4E9F5"/>
+          <p:cNvPr id="18" name="Shape 16"/>
+          <p:cNvSpPr/>
+          <p:nvPr/>
+        </p:nvSpPr>
+        <p:spPr>
+          <a:xfrm>
+            <a:off x="548640" y="4672584"/>
+            <a:ext cx="10972800" cy="384048"/>
+          </a:xfrm>
+          <a:prstGeom prst="rect">
+            <a:avLst/>
+          </a:prstGeom>
+          <a:solidFill>
+            <a:srgbClr val="FFFFFF"/>
+          </a:solidFill>
+          <a:ln/>
+        </p:spPr>
+      </p:sp>
+      <p:sp>
+        <p:nvSpPr>
+          <p:cNvPr id="19" name="Text 17"/>
+          <p:cNvSpPr/>
+          <p:nvPr/>
+        </p:nvSpPr>
+        <p:spPr>
+          <a:xfrm>
+            <a:off x="685800" y="4672584"/>
+            <a:ext cx="2011680" cy="384048"/>
+          </a:xfrm>
+          <a:prstGeom prst="rect">
+            <a:avLst/>
+          </a:prstGeom>
+          <a:noFill/>
+          <a:ln/>
+        </p:spPr>
+        <p:txBody>
+          <a:bodyPr wrap="square" rtlCol="0" anchor="ctr"/>
+          <a:lstStyle/>
+          <a:p>
+            <a:pPr indent="0" marL="0">
+              <a:buNone/>
+            </a:pPr>
+            <a:r>
+              <a:rPr lang="en-US" sz="1250" dirty="0">
+                <a:solidFill>
+                  <a:srgbClr val="3A3F4B"/>
                 </a:solidFill>
                 <a:latin typeface="Calibri" pitchFamily="34" charset="0"/>
                 <a:ea typeface="Calibri" pitchFamily="34" charset="-122"/>
                 <a:cs typeface="Calibri" pitchFamily="34" charset="-120"/>
               </a:rPr>
-              <a:t>Overbought</a:t>
-            </a:r>
-            <a:endParaRPr lang="en-US" sz="1300" dirty="0"/>
-          </a:p>
-        </p:txBody>
-      </p:sp>
-      <p:sp>
-        <p:nvSpPr>
-          <p:cNvPr id="14" name="Text 12"/>
-          <p:cNvSpPr/>
-          <p:nvPr/>
-        </p:nvSpPr>
-        <p:spPr>
-          <a:xfrm>
-            <a:off x="8092440" y="2496312"/>
-            <a:ext cx="1463040" cy="502920"/>
-          </a:xfrm>
-          <a:prstGeom prst="rect">
-            <a:avLst/>
-          </a:prstGeom>
-          <a:noFill/>
-          <a:ln/>
-        </p:spPr>
-        <p:txBody>
-          <a:bodyPr wrap="square" rtlCol="0" anchor="ctr"/>
-          <a:lstStyle/>
-          <a:p>
-            <a:pPr marL="0" indent="0">
+              <a:t>Neutral</a:t>
+            </a:r>
+            <a:endParaRPr lang="en-US" sz="1250" dirty="0"/>
+          </a:p>
+        </p:txBody>
+      </p:sp>
+      <p:sp>
+        <p:nvSpPr>
+          <p:cNvPr id="20" name="Text 18"/>
+          <p:cNvSpPr/>
+          <p:nvPr/>
+        </p:nvSpPr>
+        <p:spPr>
+          <a:xfrm>
+            <a:off x="2880360" y="4672584"/>
+            <a:ext cx="2011680" cy="384048"/>
+          </a:xfrm>
+          <a:prstGeom prst="rect">
+            <a:avLst/>
+          </a:prstGeom>
+          <a:noFill/>
+          <a:ln/>
+        </p:spPr>
+        <p:txBody>
+          <a:bodyPr wrap="square" rtlCol="0" anchor="ctr"/>
+          <a:lstStyle/>
+          <a:p>
+            <a:pPr indent="0" marL="0">
               <a:buNone/>
             </a:pPr>
             <a:r>
               <a:rPr lang="en-US" sz="1250" dirty="0">
                 <a:solidFill>
-                  <a:srgbClr val="CADCFC"/>
+                  <a:srgbClr val="3A3F4B"/>
+                </a:solidFill>
+                <a:latin typeface="Calibri" pitchFamily="34" charset="0"/>
+                <a:ea typeface="Calibri" pitchFamily="34" charset="-122"/>
+                <a:cs typeface="Calibri" pitchFamily="34" charset="-120"/>
+              </a:rPr>
+              <a:t>7</a:t>
+            </a:r>
+            <a:endParaRPr lang="en-US" sz="1250" dirty="0"/>
+          </a:p>
+        </p:txBody>
+      </p:sp>
+      <p:sp>
+        <p:nvSpPr>
+          <p:cNvPr id="21" name="Text 19"/>
+          <p:cNvSpPr/>
+          <p:nvPr/>
+        </p:nvSpPr>
+        <p:spPr>
+          <a:xfrm>
+            <a:off x="5074920" y="4672584"/>
+            <a:ext cx="2011680" cy="384048"/>
+          </a:xfrm>
+          <a:prstGeom prst="rect">
+            <a:avLst/>
+          </a:prstGeom>
+          <a:noFill/>
+          <a:ln/>
+        </p:spPr>
+        <p:txBody>
+          <a:bodyPr wrap="square" rtlCol="0" anchor="ctr"/>
+          <a:lstStyle/>
+          <a:p>
+            <a:pPr indent="0" marL="0">
+              <a:buNone/>
+            </a:pPr>
+            <a:r>
+              <a:rPr lang="en-US" sz="1250" dirty="0">
+                <a:solidFill>
+                  <a:srgbClr val="3A3F4B"/>
+                </a:solidFill>
+                <a:latin typeface="Calibri" pitchFamily="34" charset="0"/>
+                <a:ea typeface="Calibri" pitchFamily="34" charset="-122"/>
+                <a:cs typeface="Calibri" pitchFamily="34" charset="-120"/>
+              </a:rPr>
+              <a:t>7</a:t>
+            </a:r>
+            <a:endParaRPr lang="en-US" sz="1250" dirty="0"/>
+          </a:p>
+        </p:txBody>
+      </p:sp>
+      <p:sp>
+        <p:nvSpPr>
+          <p:cNvPr id="22" name="Text 20"/>
+          <p:cNvSpPr/>
+          <p:nvPr/>
+        </p:nvSpPr>
+        <p:spPr>
+          <a:xfrm>
+            <a:off x="7269480" y="4672584"/>
+            <a:ext cx="2011680" cy="384048"/>
+          </a:xfrm>
+          <a:prstGeom prst="rect">
+            <a:avLst/>
+          </a:prstGeom>
+          <a:noFill/>
+          <a:ln/>
+        </p:spPr>
+        <p:txBody>
+          <a:bodyPr wrap="square" rtlCol="0" anchor="ctr"/>
+          <a:lstStyle/>
+          <a:p>
+            <a:pPr indent="0" marL="0">
+              <a:buNone/>
+            </a:pPr>
+            <a:r>
+              <a:rPr lang="en-US" sz="1250" b="1" dirty="0">
+                <a:solidFill>
+                  <a:srgbClr val="9A6B2C"/>
                 </a:solidFill>
                 <a:latin typeface="Courier New" pitchFamily="34" charset="0"/>
                 <a:ea typeface="Courier New" pitchFamily="34" charset="-122"/>
                 <a:cs typeface="Courier New" pitchFamily="34" charset="-120"/>
               </a:rPr>
-              <a:t>RS = 10</a:t>
+              <a:t>1</a:t>
             </a:r>
             <a:endParaRPr lang="en-US" sz="1250" dirty="0"/>
           </a:p>
@@ -6975,26 +7524,26 @@
       </p:sp>
       <p:sp>
         <p:nvSpPr>
-          <p:cNvPr id="15" name="Text 13"/>
-          <p:cNvSpPr/>
-          <p:nvPr/>
-        </p:nvSpPr>
-        <p:spPr>
-          <a:xfrm>
-            <a:off x="9555480" y="2496312"/>
-            <a:ext cx="1554480" cy="502920"/>
-          </a:xfrm>
-          <a:prstGeom prst="rect">
-            <a:avLst/>
-          </a:prstGeom>
-          <a:noFill/>
-          <a:ln/>
-        </p:spPr>
-        <p:txBody>
-          <a:bodyPr wrap="square" rtlCol="0" anchor="ctr"/>
-          <a:lstStyle/>
-          <a:p>
-            <a:pPr marL="0" indent="0">
+          <p:cNvPr id="23" name="Text 21"/>
+          <p:cNvSpPr/>
+          <p:nvPr/>
+        </p:nvSpPr>
+        <p:spPr>
+          <a:xfrm>
+            <a:off x="9464040" y="4672584"/>
+            <a:ext cx="2011680" cy="384048"/>
+          </a:xfrm>
+          <a:prstGeom prst="rect">
+            <a:avLst/>
+          </a:prstGeom>
+          <a:noFill/>
+          <a:ln/>
+        </p:spPr>
+        <p:txBody>
+          <a:bodyPr wrap="square" rtlCol="0" anchor="ctr"/>
+          <a:lstStyle/>
+          <a:p>
+            <a:pPr indent="0" marL="0">
               <a:buNone/>
             </a:pPr>
             <a:r>
@@ -7006,7 +7555,7 @@
                 <a:ea typeface="Courier New" pitchFamily="34" charset="-122"/>
                 <a:cs typeface="Courier New" pitchFamily="34" charset="-120"/>
               </a:rPr>
-              <a:t>RSI = 90.9</a:t>
+              <a:t>50</a:t>
             </a:r>
             <a:endParaRPr lang="en-US" sz="1250" dirty="0"/>
           </a:p>
@@ -7014,77 +7563,175 @@
       </p:sp>
       <p:sp>
         <p:nvSpPr>
-          <p:cNvPr id="16" name="Text 14"/>
-          <p:cNvSpPr/>
-          <p:nvPr/>
-        </p:nvSpPr>
-        <p:spPr>
-          <a:xfrm>
-            <a:off x="6446520" y="3118104"/>
-            <a:ext cx="1645920" cy="502920"/>
-          </a:xfrm>
-          <a:prstGeom prst="rect">
-            <a:avLst/>
-          </a:prstGeom>
-          <a:noFill/>
-          <a:ln/>
-        </p:spPr>
-        <p:txBody>
-          <a:bodyPr wrap="square" rtlCol="0" anchor="ctr"/>
-          <a:lstStyle/>
-          <a:p>
-            <a:pPr marL="0" indent="0">
-              <a:buNone/>
-            </a:pPr>
-            <a:r>
-              <a:rPr lang="en-US" sz="1300" b="1" dirty="0">
-                <a:solidFill>
-                  <a:srgbClr val="E4E9F5"/>
+          <p:cNvPr id="24" name="Shape 22"/>
+          <p:cNvSpPr/>
+          <p:nvPr/>
+        </p:nvSpPr>
+        <p:spPr>
+          <a:xfrm>
+            <a:off x="548640" y="5093208"/>
+            <a:ext cx="10972800" cy="384048"/>
+          </a:xfrm>
+          <a:prstGeom prst="rect">
+            <a:avLst/>
+          </a:prstGeom>
+          <a:solidFill>
+            <a:srgbClr val="F1EEE3"/>
+          </a:solidFill>
+          <a:ln/>
+        </p:spPr>
+      </p:sp>
+      <p:sp>
+        <p:nvSpPr>
+          <p:cNvPr id="25" name="Text 23"/>
+          <p:cNvSpPr/>
+          <p:nvPr/>
+        </p:nvSpPr>
+        <p:spPr>
+          <a:xfrm>
+            <a:off x="685800" y="5093208"/>
+            <a:ext cx="2011680" cy="384048"/>
+          </a:xfrm>
+          <a:prstGeom prst="rect">
+            <a:avLst/>
+          </a:prstGeom>
+          <a:noFill/>
+          <a:ln/>
+        </p:spPr>
+        <p:txBody>
+          <a:bodyPr wrap="square" rtlCol="0" anchor="ctr"/>
+          <a:lstStyle/>
+          <a:p>
+            <a:pPr indent="0" marL="0">
+              <a:buNone/>
+            </a:pPr>
+            <a:r>
+              <a:rPr lang="en-US" sz="1250" dirty="0">
+                <a:solidFill>
+                  <a:srgbClr val="3A3F4B"/>
                 </a:solidFill>
                 <a:latin typeface="Calibri" pitchFamily="34" charset="0"/>
                 <a:ea typeface="Calibri" pitchFamily="34" charset="-122"/>
                 <a:cs typeface="Calibri" pitchFamily="34" charset="-120"/>
               </a:rPr>
-              <a:t>Oversold</a:t>
-            </a:r>
-            <a:endParaRPr lang="en-US" sz="1300" dirty="0"/>
-          </a:p>
-        </p:txBody>
-      </p:sp>
-      <p:sp>
-        <p:nvSpPr>
-          <p:cNvPr id="17" name="Text 15"/>
-          <p:cNvSpPr/>
-          <p:nvPr/>
-        </p:nvSpPr>
-        <p:spPr>
-          <a:xfrm>
-            <a:off x="8092440" y="3118104"/>
-            <a:ext cx="1463040" cy="502920"/>
-          </a:xfrm>
-          <a:prstGeom prst="rect">
-            <a:avLst/>
-          </a:prstGeom>
-          <a:noFill/>
-          <a:ln/>
-        </p:spPr>
-        <p:txBody>
-          <a:bodyPr wrap="square" rtlCol="0" anchor="ctr"/>
-          <a:lstStyle/>
-          <a:p>
-            <a:pPr marL="0" indent="0">
+              <a:t>Overbought</a:t>
+            </a:r>
+            <a:endParaRPr lang="en-US" sz="1250" dirty="0"/>
+          </a:p>
+        </p:txBody>
+      </p:sp>
+      <p:sp>
+        <p:nvSpPr>
+          <p:cNvPr id="26" name="Text 24"/>
+          <p:cNvSpPr/>
+          <p:nvPr/>
+        </p:nvSpPr>
+        <p:spPr>
+          <a:xfrm>
+            <a:off x="2880360" y="5093208"/>
+            <a:ext cx="2011680" cy="384048"/>
+          </a:xfrm>
+          <a:prstGeom prst="rect">
+            <a:avLst/>
+          </a:prstGeom>
+          <a:noFill/>
+          <a:ln/>
+        </p:spPr>
+        <p:txBody>
+          <a:bodyPr wrap="square" rtlCol="0" anchor="ctr"/>
+          <a:lstStyle/>
+          <a:p>
+            <a:pPr indent="0" marL="0">
               <a:buNone/>
             </a:pPr>
             <a:r>
               <a:rPr lang="en-US" sz="1250" dirty="0">
                 <a:solidFill>
-                  <a:srgbClr val="CADCFC"/>
+                  <a:srgbClr val="3A3F4B"/>
+                </a:solidFill>
+                <a:latin typeface="Calibri" pitchFamily="34" charset="0"/>
+                <a:ea typeface="Calibri" pitchFamily="34" charset="-122"/>
+                <a:cs typeface="Calibri" pitchFamily="34" charset="-120"/>
+              </a:rPr>
+              <a:t>70</a:t>
+            </a:r>
+            <a:endParaRPr lang="en-US" sz="1250" dirty="0"/>
+          </a:p>
+        </p:txBody>
+      </p:sp>
+      <p:sp>
+        <p:nvSpPr>
+          <p:cNvPr id="27" name="Text 25"/>
+          <p:cNvSpPr/>
+          <p:nvPr/>
+        </p:nvSpPr>
+        <p:spPr>
+          <a:xfrm>
+            <a:off x="5074920" y="5093208"/>
+            <a:ext cx="2011680" cy="384048"/>
+          </a:xfrm>
+          <a:prstGeom prst="rect">
+            <a:avLst/>
+          </a:prstGeom>
+          <a:noFill/>
+          <a:ln/>
+        </p:spPr>
+        <p:txBody>
+          <a:bodyPr wrap="square" rtlCol="0" anchor="ctr"/>
+          <a:lstStyle/>
+          <a:p>
+            <a:pPr indent="0" marL="0">
+              <a:buNone/>
+            </a:pPr>
+            <a:r>
+              <a:rPr lang="en-US" sz="1250" dirty="0">
+                <a:solidFill>
+                  <a:srgbClr val="3A3F4B"/>
+                </a:solidFill>
+                <a:latin typeface="Calibri" pitchFamily="34" charset="0"/>
+                <a:ea typeface="Calibri" pitchFamily="34" charset="-122"/>
+                <a:cs typeface="Calibri" pitchFamily="34" charset="-120"/>
+              </a:rPr>
+              <a:t>7</a:t>
+            </a:r>
+            <a:endParaRPr lang="en-US" sz="1250" dirty="0"/>
+          </a:p>
+        </p:txBody>
+      </p:sp>
+      <p:sp>
+        <p:nvSpPr>
+          <p:cNvPr id="28" name="Text 26"/>
+          <p:cNvSpPr/>
+          <p:nvPr/>
+        </p:nvSpPr>
+        <p:spPr>
+          <a:xfrm>
+            <a:off x="7269480" y="5093208"/>
+            <a:ext cx="2011680" cy="384048"/>
+          </a:xfrm>
+          <a:prstGeom prst="rect">
+            <a:avLst/>
+          </a:prstGeom>
+          <a:noFill/>
+          <a:ln/>
+        </p:spPr>
+        <p:txBody>
+          <a:bodyPr wrap="square" rtlCol="0" anchor="ctr"/>
+          <a:lstStyle/>
+          <a:p>
+            <a:pPr indent="0" marL="0">
+              <a:buNone/>
+            </a:pPr>
+            <a:r>
+              <a:rPr lang="en-US" sz="1250" b="1" dirty="0">
+                <a:solidFill>
+                  <a:srgbClr val="9A6B2C"/>
                 </a:solidFill>
                 <a:latin typeface="Courier New" pitchFamily="34" charset="0"/>
                 <a:ea typeface="Courier New" pitchFamily="34" charset="-122"/>
                 <a:cs typeface="Courier New" pitchFamily="34" charset="-120"/>
               </a:rPr>
-              <a:t>RS = 0.125</a:t>
+              <a:t>10</a:t>
             </a:r>
             <a:endParaRPr lang="en-US" sz="1250" dirty="0"/>
           </a:p>
@@ -7092,26 +7739,26 @@
       </p:sp>
       <p:sp>
         <p:nvSpPr>
-          <p:cNvPr id="18" name="Text 16"/>
-          <p:cNvSpPr/>
-          <p:nvPr/>
-        </p:nvSpPr>
-        <p:spPr>
-          <a:xfrm>
-            <a:off x="9555480" y="3118104"/>
-            <a:ext cx="1554480" cy="502920"/>
-          </a:xfrm>
-          <a:prstGeom prst="rect">
-            <a:avLst/>
-          </a:prstGeom>
-          <a:noFill/>
-          <a:ln/>
-        </p:spPr>
-        <p:txBody>
-          <a:bodyPr wrap="square" rtlCol="0" anchor="ctr"/>
-          <a:lstStyle/>
-          <a:p>
-            <a:pPr marL="0" indent="0">
+          <p:cNvPr id="29" name="Text 27"/>
+          <p:cNvSpPr/>
+          <p:nvPr/>
+        </p:nvSpPr>
+        <p:spPr>
+          <a:xfrm>
+            <a:off x="9464040" y="5093208"/>
+            <a:ext cx="2011680" cy="384048"/>
+          </a:xfrm>
+          <a:prstGeom prst="rect">
+            <a:avLst/>
+          </a:prstGeom>
+          <a:noFill/>
+          <a:ln/>
+        </p:spPr>
+        <p:txBody>
+          <a:bodyPr wrap="square" rtlCol="0" anchor="ctr"/>
+          <a:lstStyle/>
+          <a:p>
+            <a:pPr indent="0" marL="0">
               <a:buNone/>
             </a:pPr>
             <a:r>
@@ -7123,7 +7770,7 @@
                 <a:ea typeface="Courier New" pitchFamily="34" charset="-122"/>
                 <a:cs typeface="Courier New" pitchFamily="34" charset="-120"/>
               </a:rPr>
-              <a:t>RSI = 11</a:t>
+              <a:t>90.9</a:t>
             </a:r>
             <a:endParaRPr lang="en-US" sz="1250" dirty="0"/>
           </a:p>
@@ -7131,38 +7778,253 @@
       </p:sp>
       <p:sp>
         <p:nvSpPr>
-          <p:cNvPr id="19" name="Text 17"/>
-          <p:cNvSpPr/>
-          <p:nvPr/>
-        </p:nvSpPr>
-        <p:spPr>
-          <a:xfrm>
-            <a:off x="6446520" y="3794760"/>
-            <a:ext cx="4937760" cy="822960"/>
-          </a:xfrm>
-          <a:prstGeom prst="rect">
-            <a:avLst/>
-          </a:prstGeom>
-          <a:noFill/>
-          <a:ln/>
-        </p:spPr>
-        <p:txBody>
-          <a:bodyPr wrap="square" rtlCol="0" anchor="ctr"/>
-          <a:lstStyle/>
-          <a:p>
-            <a:pPr marL="0" indent="0">
-              <a:buNone/>
-            </a:pPr>
-            <a:r>
-              <a:rPr lang="en-US" sz="1150" i="1" dirty="0">
-                <a:solidFill>
-                  <a:srgbClr val="CADCFC"/>
+          <p:cNvPr id="30" name="Shape 28"/>
+          <p:cNvSpPr/>
+          <p:nvPr/>
+        </p:nvSpPr>
+        <p:spPr>
+          <a:xfrm>
+            <a:off x="548640" y="5513832"/>
+            <a:ext cx="10972800" cy="384048"/>
+          </a:xfrm>
+          <a:prstGeom prst="rect">
+            <a:avLst/>
+          </a:prstGeom>
+          <a:solidFill>
+            <a:srgbClr val="FFFFFF"/>
+          </a:solidFill>
+          <a:ln/>
+        </p:spPr>
+      </p:sp>
+      <p:sp>
+        <p:nvSpPr>
+          <p:cNvPr id="31" name="Text 29"/>
+          <p:cNvSpPr/>
+          <p:nvPr/>
+        </p:nvSpPr>
+        <p:spPr>
+          <a:xfrm>
+            <a:off x="685800" y="5513832"/>
+            <a:ext cx="2011680" cy="384048"/>
+          </a:xfrm>
+          <a:prstGeom prst="rect">
+            <a:avLst/>
+          </a:prstGeom>
+          <a:noFill/>
+          <a:ln/>
+        </p:spPr>
+        <p:txBody>
+          <a:bodyPr wrap="square" rtlCol="0" anchor="ctr"/>
+          <a:lstStyle/>
+          <a:p>
+            <a:pPr indent="0" marL="0">
+              <a:buNone/>
+            </a:pPr>
+            <a:r>
+              <a:rPr lang="en-US" sz="1250" dirty="0">
+                <a:solidFill>
+                  <a:srgbClr val="3A3F4B"/>
                 </a:solidFill>
                 <a:latin typeface="Calibri" pitchFamily="34" charset="0"/>
                 <a:ea typeface="Calibri" pitchFamily="34" charset="-122"/>
                 <a:cs typeface="Calibri" pitchFamily="34" charset="-120"/>
               </a:rPr>
-              <a:t>Same average gain, larger average loss, and RS drops well below 1, pulling RSI down into oversold territory.</a:t>
+              <a:t>Oversold</a:t>
+            </a:r>
+            <a:endParaRPr lang="en-US" sz="1250" dirty="0"/>
+          </a:p>
+        </p:txBody>
+      </p:sp>
+      <p:sp>
+        <p:nvSpPr>
+          <p:cNvPr id="32" name="Text 30"/>
+          <p:cNvSpPr/>
+          <p:nvPr/>
+        </p:nvSpPr>
+        <p:spPr>
+          <a:xfrm>
+            <a:off x="2880360" y="5513832"/>
+            <a:ext cx="2011680" cy="384048"/>
+          </a:xfrm>
+          <a:prstGeom prst="rect">
+            <a:avLst/>
+          </a:prstGeom>
+          <a:noFill/>
+          <a:ln/>
+        </p:spPr>
+        <p:txBody>
+          <a:bodyPr wrap="square" rtlCol="0" anchor="ctr"/>
+          <a:lstStyle/>
+          <a:p>
+            <a:pPr indent="0" marL="0">
+              <a:buNone/>
+            </a:pPr>
+            <a:r>
+              <a:rPr lang="en-US" sz="1250" dirty="0">
+                <a:solidFill>
+                  <a:srgbClr val="3A3F4B"/>
+                </a:solidFill>
+                <a:latin typeface="Calibri" pitchFamily="34" charset="0"/>
+                <a:ea typeface="Calibri" pitchFamily="34" charset="-122"/>
+                <a:cs typeface="Calibri" pitchFamily="34" charset="-120"/>
+              </a:rPr>
+              <a:t>7</a:t>
+            </a:r>
+            <a:endParaRPr lang="en-US" sz="1250" dirty="0"/>
+          </a:p>
+        </p:txBody>
+      </p:sp>
+      <p:sp>
+        <p:nvSpPr>
+          <p:cNvPr id="33" name="Text 31"/>
+          <p:cNvSpPr/>
+          <p:nvPr/>
+        </p:nvSpPr>
+        <p:spPr>
+          <a:xfrm>
+            <a:off x="5074920" y="5513832"/>
+            <a:ext cx="2011680" cy="384048"/>
+          </a:xfrm>
+          <a:prstGeom prst="rect">
+            <a:avLst/>
+          </a:prstGeom>
+          <a:noFill/>
+          <a:ln/>
+        </p:spPr>
+        <p:txBody>
+          <a:bodyPr wrap="square" rtlCol="0" anchor="ctr"/>
+          <a:lstStyle/>
+          <a:p>
+            <a:pPr indent="0" marL="0">
+              <a:buNone/>
+            </a:pPr>
+            <a:r>
+              <a:rPr lang="en-US" sz="1250" dirty="0">
+                <a:solidFill>
+                  <a:srgbClr val="3A3F4B"/>
+                </a:solidFill>
+                <a:latin typeface="Calibri" pitchFamily="34" charset="0"/>
+                <a:ea typeface="Calibri" pitchFamily="34" charset="-122"/>
+                <a:cs typeface="Calibri" pitchFamily="34" charset="-120"/>
+              </a:rPr>
+              <a:t>56</a:t>
+            </a:r>
+            <a:endParaRPr lang="en-US" sz="1250" dirty="0"/>
+          </a:p>
+        </p:txBody>
+      </p:sp>
+      <p:sp>
+        <p:nvSpPr>
+          <p:cNvPr id="34" name="Text 32"/>
+          <p:cNvSpPr/>
+          <p:nvPr/>
+        </p:nvSpPr>
+        <p:spPr>
+          <a:xfrm>
+            <a:off x="7269480" y="5513832"/>
+            <a:ext cx="2011680" cy="384048"/>
+          </a:xfrm>
+          <a:prstGeom prst="rect">
+            <a:avLst/>
+          </a:prstGeom>
+          <a:noFill/>
+          <a:ln/>
+        </p:spPr>
+        <p:txBody>
+          <a:bodyPr wrap="square" rtlCol="0" anchor="ctr"/>
+          <a:lstStyle/>
+          <a:p>
+            <a:pPr indent="0" marL="0">
+              <a:buNone/>
+            </a:pPr>
+            <a:r>
+              <a:rPr lang="en-US" sz="1250" b="1" dirty="0">
+                <a:solidFill>
+                  <a:srgbClr val="9A6B2C"/>
+                </a:solidFill>
+                <a:latin typeface="Courier New" pitchFamily="34" charset="0"/>
+                <a:ea typeface="Courier New" pitchFamily="34" charset="-122"/>
+                <a:cs typeface="Courier New" pitchFamily="34" charset="-120"/>
+              </a:rPr>
+              <a:t>0.125</a:t>
+            </a:r>
+            <a:endParaRPr lang="en-US" sz="1250" dirty="0"/>
+          </a:p>
+        </p:txBody>
+      </p:sp>
+      <p:sp>
+        <p:nvSpPr>
+          <p:cNvPr id="35" name="Text 33"/>
+          <p:cNvSpPr/>
+          <p:nvPr/>
+        </p:nvSpPr>
+        <p:spPr>
+          <a:xfrm>
+            <a:off x="9464040" y="5513832"/>
+            <a:ext cx="2011680" cy="384048"/>
+          </a:xfrm>
+          <a:prstGeom prst="rect">
+            <a:avLst/>
+          </a:prstGeom>
+          <a:noFill/>
+          <a:ln/>
+        </p:spPr>
+        <p:txBody>
+          <a:bodyPr wrap="square" rtlCol="0" anchor="ctr"/>
+          <a:lstStyle/>
+          <a:p>
+            <a:pPr indent="0" marL="0">
+              <a:buNone/>
+            </a:pPr>
+            <a:r>
+              <a:rPr lang="en-US" sz="1250" b="1" dirty="0">
+                <a:solidFill>
+                  <a:srgbClr val="9A6B2C"/>
+                </a:solidFill>
+                <a:latin typeface="Courier New" pitchFamily="34" charset="0"/>
+                <a:ea typeface="Courier New" pitchFamily="34" charset="-122"/>
+                <a:cs typeface="Courier New" pitchFamily="34" charset="-120"/>
+              </a:rPr>
+              <a:t>11.1</a:t>
+            </a:r>
+            <a:endParaRPr lang="en-US" sz="1250" dirty="0"/>
+          </a:p>
+        </p:txBody>
+      </p:sp>
+      <p:sp>
+        <p:nvSpPr>
+          <p:cNvPr id="36" name="Text 34"/>
+          <p:cNvSpPr/>
+          <p:nvPr/>
+        </p:nvSpPr>
+        <p:spPr>
+          <a:xfrm>
+            <a:off x="548640" y="5989320"/>
+            <a:ext cx="10972800" cy="457200"/>
+          </a:xfrm>
+          <a:prstGeom prst="rect">
+            <a:avLst/>
+          </a:prstGeom>
+          <a:noFill/>
+          <a:ln/>
+        </p:spPr>
+        <p:txBody>
+          <a:bodyPr wrap="square" rtlCol="0" anchor="ctr"/>
+          <a:lstStyle/>
+          <a:p>
+            <a:pPr indent="0" marL="0">
+              <a:buNone/>
+            </a:pPr>
+            <a:r>
+              <a:rPr lang="en-US" sz="1150" i="1" dirty="0">
+                <a:solidFill>
+                  <a:srgbClr val="8A8577"/>
+                </a:solidFill>
+                <a:latin typeface="Calibri" pitchFamily="34" charset="0"/>
+                <a:ea typeface="Calibri" pitchFamily="34" charset="-122"/>
+                <a:cs typeface="Calibri" pitchFamily="34" charset="-120"/>
+              </a:rPr>
+              <a:t>Every row divides by the same n = 14. Only the gain and loss totals change, and that alone moves RSI from neutral to overbought to oversold.</a:t>
             </a:r>
             <a:endParaRPr lang="en-US" sz="1150" dirty="0"/>
           </a:p>
@@ -7184,7 +8046,6 @@
         <a:solidFill>
           <a:srgbClr val="FAFAF7"/>
         </a:solidFill>
-        <a:effectLst/>
       </p:bgPr>
     </p:bg>
     <p:spTree>
@@ -7223,14 +8084,14 @@
       </p:sp>
       <p:pic>
         <p:nvPicPr>
-          <p:cNvPr id="3" name="Image 0" descr="preencoded.png"/>
+          <p:cNvPr id="3" name="Image 0" descr="preencoded.png">    </p:cNvPr>
           <p:cNvPicPr>
             <a:picLocks noChangeAspect="1"/>
           </p:cNvPicPr>
           <p:nvPr/>
         </p:nvPicPr>
         <p:blipFill>
-          <a:blip r:embed="rId3"/>
+          <a:blip r:embed="rId1"/>
           <a:stretch>
             <a:fillRect/>
           </a:stretch>
@@ -7266,7 +8127,7 @@
           <a:bodyPr wrap="square" rtlCol="0" anchor="ctr"/>
           <a:lstStyle/>
           <a:p>
-            <a:pPr marL="0" indent="0">
+            <a:pPr indent="0" marL="0">
               <a:buNone/>
             </a:pPr>
             <a:r>
@@ -7465,7 +8326,7 @@
           <a:bodyPr wrap="square" rtlCol="0" anchor="ctr"/>
           <a:lstStyle/>
           <a:p>
-            <a:pPr marL="0" indent="0">
+            <a:pPr indent="0" marL="0">
               <a:buNone/>
             </a:pPr>
             <a:r>
@@ -7499,7 +8360,6 @@
         <a:solidFill>
           <a:srgbClr val="14213D"/>
         </a:solidFill>
-        <a:effectLst/>
       </p:bgPr>
     </p:bg>
     <p:spTree>
@@ -7538,14 +8398,14 @@
       </p:sp>
       <p:pic>
         <p:nvPicPr>
-          <p:cNvPr id="3" name="Image 0" descr="preencoded.png"/>
+          <p:cNvPr id="3" name="Image 0" descr="preencoded.png">    </p:cNvPr>
           <p:cNvPicPr>
             <a:picLocks noChangeAspect="1"/>
           </p:cNvPicPr>
           <p:nvPr/>
         </p:nvPicPr>
         <p:blipFill>
-          <a:blip r:embed="rId3"/>
+          <a:blip r:embed="rId1"/>
           <a:stretch>
             <a:fillRect/>
           </a:stretch>
@@ -7581,7 +8441,7 @@
           <a:bodyPr wrap="square" rtlCol="0" anchor="ctr"/>
           <a:lstStyle/>
           <a:p>
-            <a:pPr marL="0" indent="0">
+            <a:pPr indent="0" marL="0">
               <a:buNone/>
             </a:pPr>
             <a:r>
@@ -7640,7 +8500,7 @@
           <a:bodyPr wrap="square" rtlCol="0" anchor="ctr"/>
           <a:lstStyle/>
           <a:p>
-            <a:pPr marL="0" indent="0">
+            <a:pPr indent="0" marL="0">
               <a:buNone/>
             </a:pPr>
             <a:r>
@@ -7699,7 +8559,7 @@
           <a:bodyPr wrap="square" rtlCol="0" anchor="ctr"/>
           <a:lstStyle/>
           <a:p>
-            <a:pPr marL="0" indent="0">
+            <a:pPr indent="0" marL="0">
               <a:buNone/>
             </a:pPr>
             <a:r>
@@ -7758,7 +8618,7 @@
           <a:bodyPr wrap="square" rtlCol="0" anchor="ctr"/>
           <a:lstStyle/>
           <a:p>
-            <a:pPr marL="0" indent="0">
+            <a:pPr indent="0" marL="0">
               <a:buNone/>
             </a:pPr>
             <a:r>
@@ -7817,7 +8677,7 @@
           <a:bodyPr wrap="square" rtlCol="0" anchor="ctr"/>
           <a:lstStyle/>
           <a:p>
-            <a:pPr marL="0" indent="0">
+            <a:pPr indent="0" marL="0">
               <a:buNone/>
             </a:pPr>
             <a:r>
@@ -7856,7 +8716,7 @@
           <a:bodyPr wrap="square" rtlCol="0" anchor="ctr"/>
           <a:lstStyle/>
           <a:p>
-            <a:pPr marL="0" indent="0">
+            <a:pPr indent="0" marL="0">
               <a:buNone/>
             </a:pPr>
             <a:r>
@@ -7890,7 +8750,6 @@
         <a:solidFill>
           <a:srgbClr val="FAFAF7"/>
         </a:solidFill>
-        <a:effectLst/>
       </p:bgPr>
     </p:bg>
     <p:spTree>
@@ -7928,7 +8787,7 @@
           <a:bodyPr wrap="square" rtlCol="0" anchor="ctr"/>
           <a:lstStyle/>
           <a:p>
-            <a:pPr marL="0" indent="0">
+            <a:pPr indent="0" marL="0">
               <a:buNone/>
             </a:pPr>
             <a:r>
@@ -7967,7 +8826,7 @@
           </a:solidFill>
           <a:ln/>
           <a:effectLst>
-            <a:outerShdw blurRad="63500" dist="25400" dir="5400000" algn="bl" rotWithShape="0">
+            <a:outerShdw sx="100000" sy="100000" kx="0" ky="0" algn="bl" rotWithShape="0" blurRad="63500" dist="25400" dir="5400000">
               <a:srgbClr val="000000">
                 <a:alpha val="8000"/>
               </a:srgbClr>
@@ -8016,7 +8875,7 @@
           <a:bodyPr wrap="square" rtlCol="0" anchor="ctr"/>
           <a:lstStyle/>
           <a:p>
-            <a:pPr marL="0" indent="0" algn="ctr">
+            <a:pPr algn="ctr" indent="0" marL="0">
               <a:buNone/>
             </a:pPr>
             <a:r>
@@ -8055,7 +8914,7 @@
           <a:bodyPr wrap="square" rtlCol="0" anchor="ctr"/>
           <a:lstStyle/>
           <a:p>
-            <a:pPr marL="0" indent="0">
+            <a:pPr indent="0" marL="0">
               <a:buNone/>
             </a:pPr>
             <a:r>
@@ -8094,7 +8953,7 @@
           </a:solidFill>
           <a:ln/>
           <a:effectLst>
-            <a:outerShdw blurRad="63500" dist="25400" dir="5400000" algn="bl" rotWithShape="0">
+            <a:outerShdw sx="100000" sy="100000" kx="0" ky="0" algn="bl" rotWithShape="0" blurRad="63500" dist="25400" dir="5400000">
               <a:srgbClr val="000000">
                 <a:alpha val="8000"/>
               </a:srgbClr>
@@ -8143,7 +9002,7 @@
           <a:bodyPr wrap="square" rtlCol="0" anchor="ctr"/>
           <a:lstStyle/>
           <a:p>
-            <a:pPr marL="0" indent="0" algn="ctr">
+            <a:pPr algn="ctr" indent="0" marL="0">
               <a:buNone/>
             </a:pPr>
             <a:r>
@@ -8182,7 +9041,7 @@
           <a:bodyPr wrap="square" rtlCol="0" anchor="ctr"/>
           <a:lstStyle/>
           <a:p>
-            <a:pPr marL="0" indent="0">
+            <a:pPr indent="0" marL="0">
               <a:buNone/>
             </a:pPr>
             <a:r>
@@ -8221,7 +9080,7 @@
           </a:solidFill>
           <a:ln/>
           <a:effectLst>
-            <a:outerShdw blurRad="63500" dist="25400" dir="5400000" algn="bl" rotWithShape="0">
+            <a:outerShdw sx="100000" sy="100000" kx="0" ky="0" algn="bl" rotWithShape="0" blurRad="63500" dist="25400" dir="5400000">
               <a:srgbClr val="000000">
                 <a:alpha val="8000"/>
               </a:srgbClr>
@@ -8270,7 +9129,7 @@
           <a:bodyPr wrap="square" rtlCol="0" anchor="ctr"/>
           <a:lstStyle/>
           <a:p>
-            <a:pPr marL="0" indent="0" algn="ctr">
+            <a:pPr algn="ctr" indent="0" marL="0">
               <a:buNone/>
             </a:pPr>
             <a:r>
@@ -8309,7 +9168,7 @@
           <a:bodyPr wrap="square" rtlCol="0" anchor="ctr"/>
           <a:lstStyle/>
           <a:p>
-            <a:pPr marL="0" indent="0">
+            <a:pPr indent="0" marL="0">
               <a:buNone/>
             </a:pPr>
             <a:r>
@@ -8348,7 +9207,7 @@
           </a:solidFill>
           <a:ln/>
           <a:effectLst>
-            <a:outerShdw blurRad="63500" dist="25400" dir="5400000" algn="bl" rotWithShape="0">
+            <a:outerShdw sx="100000" sy="100000" kx="0" ky="0" algn="bl" rotWithShape="0" blurRad="63500" dist="25400" dir="5400000">
               <a:srgbClr val="000000">
                 <a:alpha val="8000"/>
               </a:srgbClr>
@@ -8397,7 +9256,7 @@
           <a:bodyPr wrap="square" rtlCol="0" anchor="ctr"/>
           <a:lstStyle/>
           <a:p>
-            <a:pPr marL="0" indent="0" algn="ctr">
+            <a:pPr algn="ctr" indent="0" marL="0">
               <a:buNone/>
             </a:pPr>
             <a:r>
@@ -8436,7 +9295,7 @@
           <a:bodyPr wrap="square" rtlCol="0" anchor="ctr"/>
           <a:lstStyle/>
           <a:p>
-            <a:pPr marL="0" indent="0">
+            <a:pPr indent="0" marL="0">
               <a:buNone/>
             </a:pPr>
             <a:r>
@@ -8475,7 +9334,7 @@
           </a:solidFill>
           <a:ln/>
           <a:effectLst>
-            <a:outerShdw blurRad="63500" dist="25400" dir="5400000" algn="bl" rotWithShape="0">
+            <a:outerShdw sx="100000" sy="100000" kx="0" ky="0" algn="bl" rotWithShape="0" blurRad="63500" dist="25400" dir="5400000">
               <a:srgbClr val="000000">
                 <a:alpha val="8000"/>
               </a:srgbClr>
@@ -8524,7 +9383,7 @@
           <a:bodyPr wrap="square" rtlCol="0" anchor="ctr"/>
           <a:lstStyle/>
           <a:p>
-            <a:pPr marL="0" indent="0" algn="ctr">
+            <a:pPr algn="ctr" indent="0" marL="0">
               <a:buNone/>
             </a:pPr>
             <a:r>
@@ -8563,7 +9422,7 @@
           <a:bodyPr wrap="square" rtlCol="0" anchor="ctr"/>
           <a:lstStyle/>
           <a:p>
-            <a:pPr marL="0" indent="0">
+            <a:pPr indent="0" marL="0">
               <a:buNone/>
             </a:pPr>
             <a:r>
@@ -8602,7 +9461,7 @@
           </a:solidFill>
           <a:ln/>
           <a:effectLst>
-            <a:outerShdw blurRad="63500" dist="25400" dir="5400000" algn="bl" rotWithShape="0">
+            <a:outerShdw sx="100000" sy="100000" kx="0" ky="0" algn="bl" rotWithShape="0" blurRad="63500" dist="25400" dir="5400000">
               <a:srgbClr val="000000">
                 <a:alpha val="8000"/>
               </a:srgbClr>
@@ -8651,7 +9510,7 @@
           <a:bodyPr wrap="square" rtlCol="0" anchor="ctr"/>
           <a:lstStyle/>
           <a:p>
-            <a:pPr marL="0" indent="0" algn="ctr">
+            <a:pPr algn="ctr" indent="0" marL="0">
               <a:buNone/>
             </a:pPr>
             <a:r>
@@ -8690,7 +9549,7 @@
           <a:bodyPr wrap="square" rtlCol="0" anchor="ctr"/>
           <a:lstStyle/>
           <a:p>
-            <a:pPr marL="0" indent="0">
+            <a:pPr indent="0" marL="0">
               <a:buNone/>
             </a:pPr>
             <a:r>
@@ -8729,7 +9588,7 @@
           <a:bodyPr wrap="square" rtlCol="0" anchor="ctr"/>
           <a:lstStyle/>
           <a:p>
-            <a:pPr marL="0" indent="0">
+            <a:pPr indent="0" marL="0">
               <a:buNone/>
             </a:pPr>
             <a:r>
@@ -8763,7 +9622,6 @@
         <a:solidFill>
           <a:srgbClr val="FAFAF7"/>
         </a:solidFill>
-        <a:effectLst/>
       </p:bgPr>
     </p:bg>
     <p:spTree>
@@ -8801,7 +9659,7 @@
           <a:bodyPr wrap="square" rtlCol="0" anchor="ctr"/>
           <a:lstStyle/>
           <a:p>
-            <a:pPr marL="0" indent="0">
+            <a:pPr indent="0" marL="0">
               <a:buNone/>
             </a:pPr>
             <a:r>
@@ -8840,7 +9698,7 @@
           </a:solidFill>
           <a:ln/>
           <a:effectLst>
-            <a:outerShdw blurRad="63500" dist="25400" dir="5400000" algn="bl" rotWithShape="0">
+            <a:outerShdw sx="100000" sy="100000" kx="0" ky="0" algn="bl" rotWithShape="0" blurRad="63500" dist="25400" dir="5400000">
               <a:srgbClr val="000000">
                 <a:alpha val="7000"/>
               </a:srgbClr>
@@ -8870,7 +9728,309 @@
       </p:sp>
       <p:pic>
         <p:nvPicPr>
-          <p:cNvPr id="5" name="Image 0" descr="preencoded.png"/>
+          <p:cNvPr id="5" name="Image 0" descr="preencoded.png">    </p:cNvPr>
+          <p:cNvPicPr>
+            <a:picLocks noChangeAspect="1"/>
+          </p:cNvPicPr>
+          <p:nvPr/>
+        </p:nvPicPr>
+        <p:blipFill>
+          <a:blip r:embed="rId1"/>
+          <a:stretch>
+            <a:fillRect/>
+          </a:stretch>
+        </p:blipFill>
+        <p:spPr>
+          <a:xfrm>
+            <a:off x="813450" y="1654698"/>
+            <a:ext cx="403068" cy="403068"/>
+          </a:xfrm>
+          <a:prstGeom prst="rect">
+            <a:avLst/>
+          </a:prstGeom>
+        </p:spPr>
+      </p:pic>
+      <p:sp>
+        <p:nvSpPr>
+          <p:cNvPr id="6" name="Text 3"/>
+          <p:cNvSpPr/>
+          <p:nvPr/>
+        </p:nvSpPr>
+        <p:spPr>
+          <a:xfrm>
+            <a:off x="1508760" y="1481328"/>
+            <a:ext cx="2377440" cy="731520"/>
+          </a:xfrm>
+          <a:prstGeom prst="rect">
+            <a:avLst/>
+          </a:prstGeom>
+          <a:noFill/>
+          <a:ln/>
+        </p:spPr>
+        <p:txBody>
+          <a:bodyPr wrap="square" rtlCol="0" anchor="ctr"/>
+          <a:lstStyle/>
+          <a:p>
+            <a:pPr indent="0" marL="0">
+              <a:buNone/>
+            </a:pPr>
+            <a:r>
+              <a:rPr lang="en-US" sz="1550" b="1" dirty="0">
+                <a:solidFill>
+                  <a:srgbClr val="9A6B2C"/>
+                </a:solidFill>
+                <a:latin typeface="Cambria" pitchFamily="34" charset="0"/>
+                <a:ea typeface="Cambria" pitchFamily="34" charset="-122"/>
+                <a:cs typeface="Cambria" pitchFamily="34" charset="-120"/>
+              </a:rPr>
+              <a:t>Belief based</a:t>
+            </a:r>
+            <a:endParaRPr lang="en-US" sz="1550" dirty="0"/>
+          </a:p>
+        </p:txBody>
+      </p:sp>
+      <p:sp>
+        <p:nvSpPr>
+          <p:cNvPr id="7" name="Text 4"/>
+          <p:cNvSpPr/>
+          <p:nvPr/>
+        </p:nvSpPr>
+        <p:spPr>
+          <a:xfrm>
+            <a:off x="3977640" y="1463040"/>
+            <a:ext cx="7406640" cy="777240"/>
+          </a:xfrm>
+          <a:prstGeom prst="rect">
+            <a:avLst/>
+          </a:prstGeom>
+          <a:noFill/>
+          <a:ln/>
+        </p:spPr>
+        <p:txBody>
+          <a:bodyPr wrap="square" rtlCol="0" anchor="ctr"/>
+          <a:lstStyle/>
+          <a:p>
+            <a:pPr indent="0" marL="0">
+              <a:buNone/>
+            </a:pPr>
+            <a:r>
+              <a:rPr lang="en-US" sz="1250" dirty="0">
+                <a:solidFill>
+                  <a:srgbClr val="3A3F4B"/>
+                </a:solidFill>
+                <a:latin typeface="Calibri" pitchFamily="34" charset="0"/>
+                <a:ea typeface="Calibri" pitchFamily="34" charset="-122"/>
+                <a:cs typeface="Calibri" pitchFamily="34" charset="-120"/>
+              </a:rPr>
+              <a:t>A company's story or product is appealing on its own, regardless of financial or market factors.</a:t>
+            </a:r>
+            <a:endParaRPr lang="en-US" sz="1250" dirty="0"/>
+          </a:p>
+        </p:txBody>
+      </p:sp>
+      <p:sp>
+        <p:nvSpPr>
+          <p:cNvPr id="8" name="Shape 5"/>
+          <p:cNvSpPr/>
+          <p:nvPr/>
+        </p:nvSpPr>
+        <p:spPr>
+          <a:xfrm>
+            <a:off x="548640" y="2450592"/>
+            <a:ext cx="11064240" cy="960120"/>
+          </a:xfrm>
+          <a:prstGeom prst="roundRect">
+            <a:avLst>
+              <a:gd name="adj" fmla="val 6667"/>
+            </a:avLst>
+          </a:prstGeom>
+          <a:solidFill>
+            <a:srgbClr val="FFFFFF"/>
+          </a:solidFill>
+          <a:ln/>
+          <a:effectLst>
+            <a:outerShdw sx="100000" sy="100000" kx="0" ky="0" algn="bl" rotWithShape="0" blurRad="63500" dist="25400" dir="5400000">
+              <a:srgbClr val="000000">
+                <a:alpha val="7000"/>
+              </a:srgbClr>
+            </a:outerShdw>
+          </a:effectLst>
+        </p:spPr>
+      </p:sp>
+      <p:sp>
+        <p:nvSpPr>
+          <p:cNvPr id="9" name="Shape 6"/>
+          <p:cNvSpPr/>
+          <p:nvPr/>
+        </p:nvSpPr>
+        <p:spPr>
+          <a:xfrm>
+            <a:off x="749808" y="2670048"/>
+            <a:ext cx="530352" cy="530352"/>
+          </a:xfrm>
+          <a:prstGeom prst="ellipse">
+            <a:avLst/>
+          </a:prstGeom>
+          <a:solidFill>
+            <a:srgbClr val="F1EEE3"/>
+          </a:solidFill>
+          <a:ln/>
+        </p:spPr>
+      </p:sp>
+      <p:pic>
+        <p:nvPicPr>
+          <p:cNvPr id="10" name="Image 1" descr="preencoded.png">    </p:cNvPr>
+          <p:cNvPicPr>
+            <a:picLocks noChangeAspect="1"/>
+          </p:cNvPicPr>
+          <p:nvPr/>
+        </p:nvPicPr>
+        <p:blipFill>
+          <a:blip r:embed="rId2"/>
+          <a:stretch>
+            <a:fillRect/>
+          </a:stretch>
+        </p:blipFill>
+        <p:spPr>
+          <a:xfrm>
+            <a:off x="813450" y="2733690"/>
+            <a:ext cx="403068" cy="403068"/>
+          </a:xfrm>
+          <a:prstGeom prst="rect">
+            <a:avLst/>
+          </a:prstGeom>
+        </p:spPr>
+      </p:pic>
+      <p:sp>
+        <p:nvSpPr>
+          <p:cNvPr id="11" name="Text 7"/>
+          <p:cNvSpPr/>
+          <p:nvPr/>
+        </p:nvSpPr>
+        <p:spPr>
+          <a:xfrm>
+            <a:off x="1508760" y="2560320"/>
+            <a:ext cx="2377440" cy="731520"/>
+          </a:xfrm>
+          <a:prstGeom prst="rect">
+            <a:avLst/>
+          </a:prstGeom>
+          <a:noFill/>
+          <a:ln/>
+        </p:spPr>
+        <p:txBody>
+          <a:bodyPr wrap="square" rtlCol="0" anchor="ctr"/>
+          <a:lstStyle/>
+          <a:p>
+            <a:pPr indent="0" marL="0">
+              <a:buNone/>
+            </a:pPr>
+            <a:r>
+              <a:rPr lang="en-US" sz="1550" b="1" dirty="0">
+                <a:solidFill>
+                  <a:srgbClr val="9A6B2C"/>
+                </a:solidFill>
+                <a:latin typeface="Cambria" pitchFamily="34" charset="0"/>
+                <a:ea typeface="Cambria" pitchFamily="34" charset="-122"/>
+                <a:cs typeface="Cambria" pitchFamily="34" charset="-120"/>
+              </a:rPr>
+              <a:t>Fundamental</a:t>
+            </a:r>
+            <a:endParaRPr lang="en-US" sz="1550" dirty="0"/>
+          </a:p>
+        </p:txBody>
+      </p:sp>
+      <p:sp>
+        <p:nvSpPr>
+          <p:cNvPr id="12" name="Text 8"/>
+          <p:cNvSpPr/>
+          <p:nvPr/>
+        </p:nvSpPr>
+        <p:spPr>
+          <a:xfrm>
+            <a:off x="3977640" y="2542032"/>
+            <a:ext cx="7406640" cy="777240"/>
+          </a:xfrm>
+          <a:prstGeom prst="rect">
+            <a:avLst/>
+          </a:prstGeom>
+          <a:noFill/>
+          <a:ln/>
+        </p:spPr>
+        <p:txBody>
+          <a:bodyPr wrap="square" rtlCol="0" anchor="ctr"/>
+          <a:lstStyle/>
+          <a:p>
+            <a:pPr indent="0" marL="0">
+              <a:buNone/>
+            </a:pPr>
+            <a:r>
+              <a:rPr lang="en-US" sz="1250" dirty="0">
+                <a:solidFill>
+                  <a:srgbClr val="3A3F4B"/>
+                </a:solidFill>
+                <a:latin typeface="Calibri" pitchFamily="34" charset="0"/>
+                <a:ea typeface="Calibri" pitchFamily="34" charset="-122"/>
+                <a:cs typeface="Calibri" pitchFamily="34" charset="-120"/>
+              </a:rPr>
+              <a:t>Traditional financial indicators (earnings, revenue) trigger the decision, regardless of sector or product.</a:t>
+            </a:r>
+            <a:endParaRPr lang="en-US" sz="1250" dirty="0"/>
+          </a:p>
+        </p:txBody>
+      </p:sp>
+      <p:sp>
+        <p:nvSpPr>
+          <p:cNvPr id="13" name="Shape 9"/>
+          <p:cNvSpPr/>
+          <p:nvPr/>
+        </p:nvSpPr>
+        <p:spPr>
+          <a:xfrm>
+            <a:off x="548640" y="3529584"/>
+            <a:ext cx="11064240" cy="960120"/>
+          </a:xfrm>
+          <a:prstGeom prst="roundRect">
+            <a:avLst>
+              <a:gd name="adj" fmla="val 6667"/>
+            </a:avLst>
+          </a:prstGeom>
+          <a:solidFill>
+            <a:srgbClr val="FFFFFF"/>
+          </a:solidFill>
+          <a:ln/>
+          <a:effectLst>
+            <a:outerShdw sx="100000" sy="100000" kx="0" ky="0" algn="bl" rotWithShape="0" blurRad="63500" dist="25400" dir="5400000">
+              <a:srgbClr val="000000">
+                <a:alpha val="7000"/>
+              </a:srgbClr>
+            </a:outerShdw>
+          </a:effectLst>
+        </p:spPr>
+      </p:sp>
+      <p:sp>
+        <p:nvSpPr>
+          <p:cNvPr id="14" name="Shape 10"/>
+          <p:cNvSpPr/>
+          <p:nvPr/>
+        </p:nvSpPr>
+        <p:spPr>
+          <a:xfrm>
+            <a:off x="749808" y="3749040"/>
+            <a:ext cx="530352" cy="530352"/>
+          </a:xfrm>
+          <a:prstGeom prst="ellipse">
+            <a:avLst/>
+          </a:prstGeom>
+          <a:solidFill>
+            <a:srgbClr val="F1EEE3"/>
+          </a:solidFill>
+          <a:ln/>
+        </p:spPr>
+      </p:sp>
+      <p:pic>
+        <p:nvPicPr>
+          <p:cNvPr id="15" name="Image 2" descr="preencoded.png">    </p:cNvPr>
           <p:cNvPicPr>
             <a:picLocks noChangeAspect="1"/>
           </p:cNvPicPr>
@@ -8884,7 +10044,7 @@
         </p:blipFill>
         <p:spPr>
           <a:xfrm>
-            <a:off x="813450" y="1654698"/>
+            <a:off x="813450" y="3812682"/>
             <a:ext cx="403068" cy="403068"/>
           </a:xfrm>
           <a:prstGeom prst="rect">
@@ -8894,13 +10054,13 @@
       </p:pic>
       <p:sp>
         <p:nvSpPr>
-          <p:cNvPr id="6" name="Text 3"/>
-          <p:cNvSpPr/>
-          <p:nvPr/>
-        </p:nvSpPr>
-        <p:spPr>
-          <a:xfrm>
-            <a:off x="1508760" y="1481328"/>
+          <p:cNvPr id="16" name="Text 11"/>
+          <p:cNvSpPr/>
+          <p:nvPr/>
+        </p:nvSpPr>
+        <p:spPr>
+          <a:xfrm>
+            <a:off x="1508760" y="3639312"/>
             <a:ext cx="2377440" cy="731520"/>
           </a:xfrm>
           <a:prstGeom prst="rect">
@@ -8913,7 +10073,7 @@
           <a:bodyPr wrap="square" rtlCol="0" anchor="ctr"/>
           <a:lstStyle/>
           <a:p>
-            <a:pPr marL="0" indent="0">
+            <a:pPr indent="0" marL="0">
               <a:buNone/>
             </a:pPr>
             <a:r>
@@ -8925,7 +10085,7 @@
                 <a:ea typeface="Cambria" pitchFamily="34" charset="-122"/>
                 <a:cs typeface="Cambria" pitchFamily="34" charset="-120"/>
               </a:rPr>
-              <a:t>Belief based</a:t>
+              <a:t>Technical</a:t>
             </a:r>
             <a:endParaRPr lang="en-US" sz="1550" dirty="0"/>
           </a:p>
@@ -8933,13 +10093,13 @@
       </p:sp>
       <p:sp>
         <p:nvSpPr>
-          <p:cNvPr id="7" name="Text 4"/>
-          <p:cNvSpPr/>
-          <p:nvPr/>
-        </p:nvSpPr>
-        <p:spPr>
-          <a:xfrm>
-            <a:off x="3977640" y="1463040"/>
+          <p:cNvPr id="17" name="Text 12"/>
+          <p:cNvSpPr/>
+          <p:nvPr/>
+        </p:nvSpPr>
+        <p:spPr>
+          <a:xfrm>
+            <a:off x="3977640" y="3621024"/>
             <a:ext cx="7406640" cy="777240"/>
           </a:xfrm>
           <a:prstGeom prst="rect">
@@ -8952,7 +10112,7 @@
           <a:bodyPr wrap="square" rtlCol="0" anchor="ctr"/>
           <a:lstStyle/>
           <a:p>
-            <a:pPr marL="0" indent="0">
+            <a:pPr indent="0" marL="0">
               <a:buNone/>
             </a:pPr>
             <a:r>
@@ -8964,7 +10124,7 @@
                 <a:ea typeface="Calibri" pitchFamily="34" charset="-122"/>
                 <a:cs typeface="Calibri" pitchFamily="34" charset="-120"/>
               </a:rPr>
-              <a:t>A company's story or product is appealing on its own, regardless of financial or market factors.</a:t>
+              <a:t>Price action itself, not the reason behind it, triggers the decision: crossovers, momentum, chart patterns.</a:t>
             </a:r>
             <a:endParaRPr lang="en-US" sz="1250" dirty="0"/>
           </a:p>
@@ -8972,13 +10132,13 @@
       </p:sp>
       <p:sp>
         <p:nvSpPr>
-          <p:cNvPr id="8" name="Shape 5"/>
-          <p:cNvSpPr/>
-          <p:nvPr/>
-        </p:nvSpPr>
-        <p:spPr>
-          <a:xfrm>
-            <a:off x="548640" y="2450592"/>
+          <p:cNvPr id="18" name="Shape 13"/>
+          <p:cNvSpPr/>
+          <p:nvPr/>
+        </p:nvSpPr>
+        <p:spPr>
+          <a:xfrm>
+            <a:off x="548640" y="4608576"/>
             <a:ext cx="11064240" cy="960120"/>
           </a:xfrm>
           <a:prstGeom prst="roundRect">
@@ -8991,7 +10151,7 @@
           </a:solidFill>
           <a:ln/>
           <a:effectLst>
-            <a:outerShdw blurRad="63500" dist="25400" dir="5400000" algn="bl" rotWithShape="0">
+            <a:outerShdw sx="100000" sy="100000" kx="0" ky="0" algn="bl" rotWithShape="0" blurRad="63500" dist="25400" dir="5400000">
               <a:srgbClr val="000000">
                 <a:alpha val="7000"/>
               </a:srgbClr>
@@ -9001,13 +10161,13 @@
       </p:sp>
       <p:sp>
         <p:nvSpPr>
-          <p:cNvPr id="9" name="Shape 6"/>
-          <p:cNvSpPr/>
-          <p:nvPr/>
-        </p:nvSpPr>
-        <p:spPr>
-          <a:xfrm>
-            <a:off x="749808" y="2670048"/>
+          <p:cNvPr id="19" name="Shape 14"/>
+          <p:cNvSpPr/>
+          <p:nvPr/>
+        </p:nvSpPr>
+        <p:spPr>
+          <a:xfrm>
+            <a:off x="749808" y="4828032"/>
             <a:ext cx="530352" cy="530352"/>
           </a:xfrm>
           <a:prstGeom prst="ellipse">
@@ -9021,7 +10181,7 @@
       </p:sp>
       <p:pic>
         <p:nvPicPr>
-          <p:cNvPr id="10" name="Image 1" descr="preencoded.png"/>
+          <p:cNvPr id="20" name="Image 3" descr="preencoded.png">    </p:cNvPr>
           <p:cNvPicPr>
             <a:picLocks noChangeAspect="1"/>
           </p:cNvPicPr>
@@ -9035,7 +10195,7 @@
         </p:blipFill>
         <p:spPr>
           <a:xfrm>
-            <a:off x="813450" y="2733690"/>
+            <a:off x="813450" y="4891674"/>
             <a:ext cx="403068" cy="403068"/>
           </a:xfrm>
           <a:prstGeom prst="rect">
@@ -9045,13 +10205,13 @@
       </p:pic>
       <p:sp>
         <p:nvSpPr>
-          <p:cNvPr id="11" name="Text 7"/>
-          <p:cNvSpPr/>
-          <p:nvPr/>
-        </p:nvSpPr>
-        <p:spPr>
-          <a:xfrm>
-            <a:off x="1508760" y="2560320"/>
+          <p:cNvPr id="21" name="Text 15"/>
+          <p:cNvSpPr/>
+          <p:nvPr/>
+        </p:nvSpPr>
+        <p:spPr>
+          <a:xfrm>
+            <a:off x="1508760" y="4718304"/>
             <a:ext cx="2377440" cy="731520"/>
           </a:xfrm>
           <a:prstGeom prst="rect">
@@ -9064,7 +10224,7 @@
           <a:bodyPr wrap="square" rtlCol="0" anchor="ctr"/>
           <a:lstStyle/>
           <a:p>
-            <a:pPr marL="0" indent="0">
+            <a:pPr indent="0" marL="0">
               <a:buNone/>
             </a:pPr>
             <a:r>
@@ -9076,7 +10236,7 @@
                 <a:ea typeface="Cambria" pitchFamily="34" charset="-122"/>
                 <a:cs typeface="Cambria" pitchFamily="34" charset="-120"/>
               </a:rPr>
-              <a:t>Fundamental</a:t>
+              <a:t>High frequency</a:t>
             </a:r>
             <a:endParaRPr lang="en-US" sz="1550" dirty="0"/>
           </a:p>
@@ -9084,13 +10244,13 @@
       </p:sp>
       <p:sp>
         <p:nvSpPr>
-          <p:cNvPr id="12" name="Text 8"/>
-          <p:cNvSpPr/>
-          <p:nvPr/>
-        </p:nvSpPr>
-        <p:spPr>
-          <a:xfrm>
-            <a:off x="3977640" y="2542032"/>
+          <p:cNvPr id="22" name="Text 16"/>
+          <p:cNvSpPr/>
+          <p:nvPr/>
+        </p:nvSpPr>
+        <p:spPr>
+          <a:xfrm>
+            <a:off x="3977640" y="4700016"/>
             <a:ext cx="7406640" cy="777240"/>
           </a:xfrm>
           <a:prstGeom prst="rect">
@@ -9103,7 +10263,7 @@
           <a:bodyPr wrap="square" rtlCol="0" anchor="ctr"/>
           <a:lstStyle/>
           <a:p>
-            <a:pPr marL="0" indent="0">
+            <a:pPr indent="0" marL="0">
               <a:buNone/>
             </a:pPr>
             <a:r>
@@ -9115,308 +10275,6 @@
                 <a:ea typeface="Calibri" pitchFamily="34" charset="-122"/>
                 <a:cs typeface="Calibri" pitchFamily="34" charset="-120"/>
               </a:rPr>
-              <a:t>Traditional financial indicators (earnings, revenue) trigger the decision, regardless of sector or product.</a:t>
-            </a:r>
-            <a:endParaRPr lang="en-US" sz="1250" dirty="0"/>
-          </a:p>
-        </p:txBody>
-      </p:sp>
-      <p:sp>
-        <p:nvSpPr>
-          <p:cNvPr id="13" name="Shape 9"/>
-          <p:cNvSpPr/>
-          <p:nvPr/>
-        </p:nvSpPr>
-        <p:spPr>
-          <a:xfrm>
-            <a:off x="548640" y="3529584"/>
-            <a:ext cx="11064240" cy="960120"/>
-          </a:xfrm>
-          <a:prstGeom prst="roundRect">
-            <a:avLst>
-              <a:gd name="adj" fmla="val 6667"/>
-            </a:avLst>
-          </a:prstGeom>
-          <a:solidFill>
-            <a:srgbClr val="FFFFFF"/>
-          </a:solidFill>
-          <a:ln/>
-          <a:effectLst>
-            <a:outerShdw blurRad="63500" dist="25400" dir="5400000" algn="bl" rotWithShape="0">
-              <a:srgbClr val="000000">
-                <a:alpha val="7000"/>
-              </a:srgbClr>
-            </a:outerShdw>
-          </a:effectLst>
-        </p:spPr>
-      </p:sp>
-      <p:sp>
-        <p:nvSpPr>
-          <p:cNvPr id="14" name="Shape 10"/>
-          <p:cNvSpPr/>
-          <p:nvPr/>
-        </p:nvSpPr>
-        <p:spPr>
-          <a:xfrm>
-            <a:off x="749808" y="3749040"/>
-            <a:ext cx="530352" cy="530352"/>
-          </a:xfrm>
-          <a:prstGeom prst="ellipse">
-            <a:avLst/>
-          </a:prstGeom>
-          <a:solidFill>
-            <a:srgbClr val="F1EEE3"/>
-          </a:solidFill>
-          <a:ln/>
-        </p:spPr>
-      </p:sp>
-      <p:pic>
-        <p:nvPicPr>
-          <p:cNvPr id="15" name="Image 2" descr="preencoded.png"/>
-          <p:cNvPicPr>
-            <a:picLocks noChangeAspect="1"/>
-          </p:cNvPicPr>
-          <p:nvPr/>
-        </p:nvPicPr>
-        <p:blipFill>
-          <a:blip r:embed="rId5"/>
-          <a:stretch>
-            <a:fillRect/>
-          </a:stretch>
-        </p:blipFill>
-        <p:spPr>
-          <a:xfrm>
-            <a:off x="813450" y="3812682"/>
-            <a:ext cx="403068" cy="403068"/>
-          </a:xfrm>
-          <a:prstGeom prst="rect">
-            <a:avLst/>
-          </a:prstGeom>
-        </p:spPr>
-      </p:pic>
-      <p:sp>
-        <p:nvSpPr>
-          <p:cNvPr id="16" name="Text 11"/>
-          <p:cNvSpPr/>
-          <p:nvPr/>
-        </p:nvSpPr>
-        <p:spPr>
-          <a:xfrm>
-            <a:off x="1508760" y="3639312"/>
-            <a:ext cx="2377440" cy="731520"/>
-          </a:xfrm>
-          <a:prstGeom prst="rect">
-            <a:avLst/>
-          </a:prstGeom>
-          <a:noFill/>
-          <a:ln/>
-        </p:spPr>
-        <p:txBody>
-          <a:bodyPr wrap="square" rtlCol="0" anchor="ctr"/>
-          <a:lstStyle/>
-          <a:p>
-            <a:pPr marL="0" indent="0">
-              <a:buNone/>
-            </a:pPr>
-            <a:r>
-              <a:rPr lang="en-US" sz="1550" b="1" dirty="0">
-                <a:solidFill>
-                  <a:srgbClr val="9A6B2C"/>
-                </a:solidFill>
-                <a:latin typeface="Cambria" pitchFamily="34" charset="0"/>
-                <a:ea typeface="Cambria" pitchFamily="34" charset="-122"/>
-                <a:cs typeface="Cambria" pitchFamily="34" charset="-120"/>
-              </a:rPr>
-              <a:t>Technical</a:t>
-            </a:r>
-            <a:endParaRPr lang="en-US" sz="1550" dirty="0"/>
-          </a:p>
-        </p:txBody>
-      </p:sp>
-      <p:sp>
-        <p:nvSpPr>
-          <p:cNvPr id="17" name="Text 12"/>
-          <p:cNvSpPr/>
-          <p:nvPr/>
-        </p:nvSpPr>
-        <p:spPr>
-          <a:xfrm>
-            <a:off x="3977640" y="3621024"/>
-            <a:ext cx="7406640" cy="777240"/>
-          </a:xfrm>
-          <a:prstGeom prst="rect">
-            <a:avLst/>
-          </a:prstGeom>
-          <a:noFill/>
-          <a:ln/>
-        </p:spPr>
-        <p:txBody>
-          <a:bodyPr wrap="square" rtlCol="0" anchor="ctr"/>
-          <a:lstStyle/>
-          <a:p>
-            <a:pPr marL="0" indent="0">
-              <a:buNone/>
-            </a:pPr>
-            <a:r>
-              <a:rPr lang="en-US" sz="1250" dirty="0">
-                <a:solidFill>
-                  <a:srgbClr val="3A3F4B"/>
-                </a:solidFill>
-                <a:latin typeface="Calibri" pitchFamily="34" charset="0"/>
-                <a:ea typeface="Calibri" pitchFamily="34" charset="-122"/>
-                <a:cs typeface="Calibri" pitchFamily="34" charset="-120"/>
-              </a:rPr>
-              <a:t>Price action itself, not the reason behind it, triggers the decision: crossovers, momentum, chart patterns.</a:t>
-            </a:r>
-            <a:endParaRPr lang="en-US" sz="1250" dirty="0"/>
-          </a:p>
-        </p:txBody>
-      </p:sp>
-      <p:sp>
-        <p:nvSpPr>
-          <p:cNvPr id="18" name="Shape 13"/>
-          <p:cNvSpPr/>
-          <p:nvPr/>
-        </p:nvSpPr>
-        <p:spPr>
-          <a:xfrm>
-            <a:off x="548640" y="4608576"/>
-            <a:ext cx="11064240" cy="960120"/>
-          </a:xfrm>
-          <a:prstGeom prst="roundRect">
-            <a:avLst>
-              <a:gd name="adj" fmla="val 6667"/>
-            </a:avLst>
-          </a:prstGeom>
-          <a:solidFill>
-            <a:srgbClr val="FFFFFF"/>
-          </a:solidFill>
-          <a:ln/>
-          <a:effectLst>
-            <a:outerShdw blurRad="63500" dist="25400" dir="5400000" algn="bl" rotWithShape="0">
-              <a:srgbClr val="000000">
-                <a:alpha val="7000"/>
-              </a:srgbClr>
-            </a:outerShdw>
-          </a:effectLst>
-        </p:spPr>
-      </p:sp>
-      <p:sp>
-        <p:nvSpPr>
-          <p:cNvPr id="19" name="Shape 14"/>
-          <p:cNvSpPr/>
-          <p:nvPr/>
-        </p:nvSpPr>
-        <p:spPr>
-          <a:xfrm>
-            <a:off x="749808" y="4828032"/>
-            <a:ext cx="530352" cy="530352"/>
-          </a:xfrm>
-          <a:prstGeom prst="ellipse">
-            <a:avLst/>
-          </a:prstGeom>
-          <a:solidFill>
-            <a:srgbClr val="F1EEE3"/>
-          </a:solidFill>
-          <a:ln/>
-        </p:spPr>
-      </p:sp>
-      <p:pic>
-        <p:nvPicPr>
-          <p:cNvPr id="20" name="Image 3" descr="preencoded.png"/>
-          <p:cNvPicPr>
-            <a:picLocks noChangeAspect="1"/>
-          </p:cNvPicPr>
-          <p:nvPr/>
-        </p:nvPicPr>
-        <p:blipFill>
-          <a:blip r:embed="rId6"/>
-          <a:stretch>
-            <a:fillRect/>
-          </a:stretch>
-        </p:blipFill>
-        <p:spPr>
-          <a:xfrm>
-            <a:off x="813450" y="4891674"/>
-            <a:ext cx="403068" cy="403068"/>
-          </a:xfrm>
-          <a:prstGeom prst="rect">
-            <a:avLst/>
-          </a:prstGeom>
-        </p:spPr>
-      </p:pic>
-      <p:sp>
-        <p:nvSpPr>
-          <p:cNvPr id="21" name="Text 15"/>
-          <p:cNvSpPr/>
-          <p:nvPr/>
-        </p:nvSpPr>
-        <p:spPr>
-          <a:xfrm>
-            <a:off x="1508760" y="4718304"/>
-            <a:ext cx="2377440" cy="731520"/>
-          </a:xfrm>
-          <a:prstGeom prst="rect">
-            <a:avLst/>
-          </a:prstGeom>
-          <a:noFill/>
-          <a:ln/>
-        </p:spPr>
-        <p:txBody>
-          <a:bodyPr wrap="square" rtlCol="0" anchor="ctr"/>
-          <a:lstStyle/>
-          <a:p>
-            <a:pPr marL="0" indent="0">
-              <a:buNone/>
-            </a:pPr>
-            <a:r>
-              <a:rPr lang="en-US" sz="1550" b="1" dirty="0">
-                <a:solidFill>
-                  <a:srgbClr val="9A6B2C"/>
-                </a:solidFill>
-                <a:latin typeface="Cambria" pitchFamily="34" charset="0"/>
-                <a:ea typeface="Cambria" pitchFamily="34" charset="-122"/>
-                <a:cs typeface="Cambria" pitchFamily="34" charset="-120"/>
-              </a:rPr>
-              <a:t>High frequency</a:t>
-            </a:r>
-            <a:endParaRPr lang="en-US" sz="1550" dirty="0"/>
-          </a:p>
-        </p:txBody>
-      </p:sp>
-      <p:sp>
-        <p:nvSpPr>
-          <p:cNvPr id="22" name="Text 16"/>
-          <p:cNvSpPr/>
-          <p:nvPr/>
-        </p:nvSpPr>
-        <p:spPr>
-          <a:xfrm>
-            <a:off x="3977640" y="4700016"/>
-            <a:ext cx="7406640" cy="777240"/>
-          </a:xfrm>
-          <a:prstGeom prst="rect">
-            <a:avLst/>
-          </a:prstGeom>
-          <a:noFill/>
-          <a:ln/>
-        </p:spPr>
-        <p:txBody>
-          <a:bodyPr wrap="square" rtlCol="0" anchor="ctr"/>
-          <a:lstStyle/>
-          <a:p>
-            <a:pPr marL="0" indent="0">
-              <a:buNone/>
-            </a:pPr>
-            <a:r>
-              <a:rPr lang="en-US" sz="1250" dirty="0">
-                <a:solidFill>
-                  <a:srgbClr val="3A3F4B"/>
-                </a:solidFill>
-                <a:latin typeface="Calibri" pitchFamily="34" charset="0"/>
-                <a:ea typeface="Calibri" pitchFamily="34" charset="-122"/>
-                <a:cs typeface="Calibri" pitchFamily="34" charset="-120"/>
-              </a:rPr>
               <a:t>Algorithmic scalping measured in fractions of a second. No human in the loop, profit from market making.</a:t>
             </a:r>
             <a:endParaRPr lang="en-US" sz="1250" dirty="0"/>
@@ -9444,7 +10302,7 @@
           <a:bodyPr wrap="square" rtlCol="0" anchor="ctr"/>
           <a:lstStyle/>
           <a:p>
-            <a:pPr marL="0" indent="0">
+            <a:pPr indent="0" marL="0">
               <a:buNone/>
             </a:pPr>
             <a:r>
@@ -9478,7 +10336,6 @@
         <a:solidFill>
           <a:srgbClr val="14213D"/>
         </a:solidFill>
-        <a:effectLst/>
       </p:bgPr>
     </p:bg>
     <p:spTree>
@@ -9517,14 +10374,14 @@
       </p:sp>
       <p:pic>
         <p:nvPicPr>
-          <p:cNvPr id="3" name="Image 0" descr="preencoded.png"/>
+          <p:cNvPr id="3" name="Image 0" descr="preencoded.png">    </p:cNvPr>
           <p:cNvPicPr>
             <a:picLocks noChangeAspect="1"/>
           </p:cNvPicPr>
           <p:nvPr/>
         </p:nvPicPr>
         <p:blipFill>
-          <a:blip r:embed="rId3"/>
+          <a:blip r:embed="rId1"/>
           <a:stretch>
             <a:fillRect/>
           </a:stretch>
@@ -9560,7 +10417,7 @@
           <a:bodyPr wrap="square" rtlCol="0" anchor="ctr"/>
           <a:lstStyle/>
           <a:p>
-            <a:pPr marL="0" indent="0">
+            <a:pPr indent="0" marL="0">
               <a:buNone/>
             </a:pPr>
             <a:r>
@@ -9599,7 +10456,7 @@
           <a:bodyPr wrap="square" rtlCol="0" anchor="ctr"/>
           <a:lstStyle/>
           <a:p>
-            <a:pPr marL="0" indent="0">
+            <a:pPr indent="0" marL="0">
               <a:buNone/>
             </a:pPr>
             <a:r>
@@ -9660,7 +10517,7 @@
           <a:bodyPr wrap="square" rtlCol="0" anchor="ctr"/>
           <a:lstStyle/>
           <a:p>
-            <a:pPr marL="0" indent="0">
+            <a:pPr indent="0" marL="0">
               <a:buNone/>
             </a:pPr>
             <a:r>
@@ -9699,7 +10556,7 @@
           <a:bodyPr wrap="square" rtlCol="0" anchor="ctr"/>
           <a:lstStyle/>
           <a:p>
-            <a:pPr marL="0" indent="0">
+            <a:pPr indent="0" marL="0">
               <a:lnSpc>
                 <a:spcPct val="125000"/>
               </a:lnSpc>
@@ -9741,7 +10598,7 @@
           <a:bodyPr wrap="square" rtlCol="0" anchor="ctr"/>
           <a:lstStyle/>
           <a:p>
-            <a:pPr marL="0" indent="0">
+            <a:pPr indent="0" marL="0">
               <a:buNone/>
             </a:pPr>
             <a:r>
@@ -9775,7 +10632,6 @@
         <a:solidFill>
           <a:srgbClr val="FAFAF7"/>
         </a:solidFill>
-        <a:effectLst/>
       </p:bgPr>
     </p:bg>
     <p:spTree>
@@ -9814,14 +10670,14 @@
       </p:sp>
       <p:pic>
         <p:nvPicPr>
-          <p:cNvPr id="3" name="Image 0" descr="preencoded.png"/>
+          <p:cNvPr id="3" name="Image 0" descr="preencoded.png">    </p:cNvPr>
           <p:cNvPicPr>
             <a:picLocks noChangeAspect="1"/>
           </p:cNvPicPr>
           <p:nvPr/>
         </p:nvPicPr>
         <p:blipFill>
-          <a:blip r:embed="rId3"/>
+          <a:blip r:embed="rId1"/>
           <a:stretch>
             <a:fillRect/>
           </a:stretch>
@@ -9857,7 +10713,7 @@
           <a:bodyPr wrap="square" rtlCol="0" anchor="ctr"/>
           <a:lstStyle/>
           <a:p>
-            <a:pPr marL="0" indent="0">
+            <a:pPr indent="0" marL="0">
               <a:buNone/>
             </a:pPr>
             <a:r>
@@ -9896,7 +10752,7 @@
           <a:bodyPr wrap="square" rtlCol="0" anchor="ctr"/>
           <a:lstStyle/>
           <a:p>
-            <a:pPr marL="0" indent="0">
+            <a:pPr indent="0" marL="0">
               <a:buNone/>
             </a:pPr>
             <a:r>
@@ -9955,7 +10811,7 @@
           <a:bodyPr wrap="square" rtlCol="0" anchor="ctr"/>
           <a:lstStyle/>
           <a:p>
-            <a:pPr marL="0" indent="0">
+            <a:pPr indent="0" marL="0">
               <a:buNone/>
             </a:pPr>
             <a:r>
@@ -10014,7 +10870,7 @@
           <a:bodyPr wrap="square" rtlCol="0" anchor="ctr"/>
           <a:lstStyle/>
           <a:p>
-            <a:pPr marL="0" indent="0">
+            <a:pPr indent="0" marL="0">
               <a:buNone/>
             </a:pPr>
             <a:r>
@@ -10073,7 +10929,7 @@
           <a:bodyPr wrap="square" rtlCol="0" anchor="ctr"/>
           <a:lstStyle/>
           <a:p>
-            <a:pPr marL="0" indent="0">
+            <a:pPr indent="0" marL="0">
               <a:buNone/>
             </a:pPr>
             <a:r>
@@ -10132,7 +10988,7 @@
           <a:bodyPr wrap="square" rtlCol="0" anchor="ctr"/>
           <a:lstStyle/>
           <a:p>
-            <a:pPr marL="0" indent="0">
+            <a:pPr indent="0" marL="0">
               <a:buNone/>
             </a:pPr>
             <a:r>
@@ -10171,7 +11027,7 @@
           <a:bodyPr wrap="square" rtlCol="0" anchor="ctr"/>
           <a:lstStyle/>
           <a:p>
-            <a:pPr marL="0" indent="0">
+            <a:pPr indent="0" marL="0">
               <a:buNone/>
             </a:pPr>
             <a:r>
@@ -10205,7 +11061,6 @@
         <a:solidFill>
           <a:srgbClr val="FAFAF7"/>
         </a:solidFill>
-        <a:effectLst/>
       </p:bgPr>
     </p:bg>
     <p:spTree>
@@ -10243,7 +11098,7 @@
           <a:bodyPr wrap="square" rtlCol="0" anchor="ctr"/>
           <a:lstStyle/>
           <a:p>
-            <a:pPr marL="0" indent="0">
+            <a:pPr indent="0" marL="0">
               <a:buNone/>
             </a:pPr>
             <a:r>
@@ -10282,7 +11137,7 @@
           </a:solidFill>
           <a:ln/>
           <a:effectLst>
-            <a:outerShdw blurRad="76200" dist="25400" dir="5400000" algn="bl" rotWithShape="0">
+            <a:outerShdw sx="100000" sy="100000" kx="0" ky="0" algn="bl" rotWithShape="0" blurRad="76200" dist="25400" dir="5400000">
               <a:srgbClr val="000000">
                 <a:alpha val="8000"/>
               </a:srgbClr>
@@ -10311,7 +11166,7 @@
           <a:bodyPr wrap="square" rtlCol="0" anchor="ctr"/>
           <a:lstStyle/>
           <a:p>
-            <a:pPr marL="0" indent="0">
+            <a:pPr indent="0" marL="0">
               <a:buNone/>
             </a:pPr>
             <a:r>
@@ -10350,7 +11205,7 @@
           <a:bodyPr wrap="square" rtlCol="0" anchor="ctr"/>
           <a:lstStyle/>
           <a:p>
-            <a:pPr marL="0" indent="0">
+            <a:pPr indent="0" marL="0">
               <a:buNone/>
             </a:pPr>
             <a:r>
@@ -10389,7 +11244,7 @@
           </a:solidFill>
           <a:ln/>
           <a:effectLst>
-            <a:outerShdw blurRad="76200" dist="25400" dir="5400000" algn="bl" rotWithShape="0">
+            <a:outerShdw sx="100000" sy="100000" kx="0" ky="0" algn="bl" rotWithShape="0" blurRad="76200" dist="25400" dir="5400000">
               <a:srgbClr val="000000">
                 <a:alpha val="8000"/>
               </a:srgbClr>
@@ -10418,7 +11273,7 @@
           <a:bodyPr wrap="square" rtlCol="0" anchor="ctr"/>
           <a:lstStyle/>
           <a:p>
-            <a:pPr marL="0" indent="0">
+            <a:pPr indent="0" marL="0">
               <a:buNone/>
             </a:pPr>
             <a:r>
@@ -10457,7 +11312,7 @@
           <a:bodyPr wrap="square" rtlCol="0" anchor="ctr"/>
           <a:lstStyle/>
           <a:p>
-            <a:pPr marL="0" indent="0">
+            <a:pPr indent="0" marL="0">
               <a:buNone/>
             </a:pPr>
             <a:r>
@@ -10496,7 +11351,7 @@
           </a:solidFill>
           <a:ln/>
           <a:effectLst>
-            <a:outerShdw blurRad="76200" dist="25400" dir="5400000" algn="bl" rotWithShape="0">
+            <a:outerShdw sx="100000" sy="100000" kx="0" ky="0" algn="bl" rotWithShape="0" blurRad="76200" dist="25400" dir="5400000">
               <a:srgbClr val="000000">
                 <a:alpha val="8000"/>
               </a:srgbClr>
@@ -10525,7 +11380,7 @@
           <a:bodyPr wrap="square" rtlCol="0" anchor="ctr"/>
           <a:lstStyle/>
           <a:p>
-            <a:pPr marL="0" indent="0">
+            <a:pPr indent="0" marL="0">
               <a:buNone/>
             </a:pPr>
             <a:r>
@@ -10564,7 +11419,7 @@
           <a:bodyPr wrap="square" rtlCol="0" anchor="ctr"/>
           <a:lstStyle/>
           <a:p>
-            <a:pPr marL="0" indent="0">
+            <a:pPr indent="0" marL="0">
               <a:buNone/>
             </a:pPr>
             <a:r>
@@ -10603,7 +11458,7 @@
           </a:solidFill>
           <a:ln/>
           <a:effectLst>
-            <a:outerShdw blurRad="76200" dist="25400" dir="5400000" algn="bl" rotWithShape="0">
+            <a:outerShdw sx="100000" sy="100000" kx="0" ky="0" algn="bl" rotWithShape="0" blurRad="76200" dist="25400" dir="5400000">
               <a:srgbClr val="000000">
                 <a:alpha val="8000"/>
               </a:srgbClr>
@@ -10632,7 +11487,7 @@
           <a:bodyPr wrap="square" rtlCol="0" anchor="ctr"/>
           <a:lstStyle/>
           <a:p>
-            <a:pPr marL="0" indent="0">
+            <a:pPr indent="0" marL="0">
               <a:buNone/>
             </a:pPr>
             <a:r>
@@ -10671,7 +11526,7 @@
           <a:bodyPr wrap="square" rtlCol="0" anchor="ctr"/>
           <a:lstStyle/>
           <a:p>
-            <a:pPr marL="0" indent="0">
+            <a:pPr indent="0" marL="0">
               <a:buNone/>
             </a:pPr>
             <a:r>
@@ -10710,7 +11565,7 @@
           <a:bodyPr wrap="square" rtlCol="0" anchor="ctr"/>
           <a:lstStyle/>
           <a:p>
-            <a:pPr marL="0" indent="0">
+            <a:pPr indent="0" marL="0">
               <a:buNone/>
             </a:pPr>
             <a:r>
@@ -10744,7 +11599,6 @@
         <a:solidFill>
           <a:srgbClr val="14213D"/>
         </a:solidFill>
-        <a:effectLst/>
       </p:bgPr>
     </p:bg>
     <p:spTree>
@@ -10783,14 +11637,14 @@
       </p:sp>
       <p:pic>
         <p:nvPicPr>
-          <p:cNvPr id="3" name="Image 0" descr="preencoded.png"/>
+          <p:cNvPr id="3" name="Image 0" descr="preencoded.png">    </p:cNvPr>
           <p:cNvPicPr>
             <a:picLocks noChangeAspect="1"/>
           </p:cNvPicPr>
           <p:nvPr/>
         </p:nvPicPr>
         <p:blipFill>
-          <a:blip r:embed="rId3"/>
+          <a:blip r:embed="rId1"/>
           <a:stretch>
             <a:fillRect/>
           </a:stretch>
@@ -10826,7 +11680,7 @@
           <a:bodyPr wrap="square" rtlCol="0" anchor="ctr"/>
           <a:lstStyle/>
           <a:p>
-            <a:pPr marL="0" indent="0">
+            <a:pPr indent="0" marL="0">
               <a:buNone/>
             </a:pPr>
             <a:r>
@@ -10887,7 +11741,7 @@
           <a:bodyPr wrap="square" rtlCol="0" anchor="ctr"/>
           <a:lstStyle/>
           <a:p>
-            <a:pPr marL="0" indent="0">
+            <a:pPr indent="0" marL="0">
               <a:buNone/>
             </a:pPr>
             <a:r>
@@ -10926,7 +11780,7 @@
           <a:bodyPr wrap="square" rtlCol="0" anchor="ctr"/>
           <a:lstStyle/>
           <a:p>
-            <a:pPr marL="0" indent="0">
+            <a:pPr indent="0" marL="0">
               <a:buNone/>
             </a:pPr>
             <a:r>
@@ -10965,7 +11819,7 @@
           <a:bodyPr wrap="square" rtlCol="0" anchor="ctr"/>
           <a:lstStyle/>
           <a:p>
-            <a:pPr marL="0" indent="0">
+            <a:pPr indent="0" marL="0">
               <a:buNone/>
             </a:pPr>
             <a:r>
@@ -11026,7 +11880,7 @@
           <a:bodyPr wrap="square" rtlCol="0" anchor="ctr"/>
           <a:lstStyle/>
           <a:p>
-            <a:pPr marL="0" indent="0">
+            <a:pPr indent="0" marL="0">
               <a:buNone/>
             </a:pPr>
             <a:r>
@@ -11065,7 +11919,7 @@
           <a:bodyPr wrap="square" rtlCol="0" anchor="ctr"/>
           <a:lstStyle/>
           <a:p>
-            <a:pPr marL="0" indent="0">
+            <a:pPr indent="0" marL="0">
               <a:buNone/>
             </a:pPr>
             <a:r>
@@ -11104,7 +11958,7 @@
           <a:bodyPr wrap="square" rtlCol="0" anchor="ctr"/>
           <a:lstStyle/>
           <a:p>
-            <a:pPr marL="0" indent="0">
+            <a:pPr indent="0" marL="0">
               <a:buNone/>
             </a:pPr>
             <a:r>
@@ -11143,7 +11997,7 @@
           <a:bodyPr wrap="square" rtlCol="0" anchor="ctr"/>
           <a:lstStyle/>
           <a:p>
-            <a:pPr marL="0" indent="0">
+            <a:pPr indent="0" marL="0">
               <a:buNone/>
             </a:pPr>
             <a:r>
@@ -11177,7 +12031,6 @@
         <a:solidFill>
           <a:srgbClr val="FAFAF7"/>
         </a:solidFill>
-        <a:effectLst/>
       </p:bgPr>
     </p:bg>
     <p:spTree>
@@ -11215,7 +12068,7 @@
           <a:bodyPr wrap="square" rtlCol="0" anchor="ctr"/>
           <a:lstStyle/>
           <a:p>
-            <a:pPr marL="0" indent="0">
+            <a:pPr indent="0" marL="0">
               <a:buNone/>
             </a:pPr>
             <a:r>
@@ -11254,7 +12107,7 @@
           </a:solidFill>
           <a:ln/>
           <a:effectLst>
-            <a:outerShdw blurRad="63500" dist="25400" dir="5400000" algn="bl" rotWithShape="0">
+            <a:outerShdw sx="100000" sy="100000" kx="0" ky="0" algn="bl" rotWithShape="0" blurRad="63500" dist="25400" dir="5400000">
               <a:srgbClr val="000000">
                 <a:alpha val="8000"/>
               </a:srgbClr>
@@ -11283,7 +12136,7 @@
           <a:bodyPr wrap="square" rtlCol="0" anchor="ctr"/>
           <a:lstStyle/>
           <a:p>
-            <a:pPr marL="0" indent="0">
+            <a:pPr indent="0" marL="0">
               <a:buNone/>
             </a:pPr>
             <a:r>
@@ -11322,7 +12175,7 @@
           <a:bodyPr wrap="square" rtlCol="0" anchor="ctr"/>
           <a:lstStyle/>
           <a:p>
-            <a:pPr marL="0" indent="0">
+            <a:pPr indent="0" marL="0">
               <a:buNone/>
             </a:pPr>
             <a:r>
@@ -11361,7 +12214,7 @@
           <a:bodyPr wrap="square" rtlCol="0" anchor="ctr"/>
           <a:lstStyle/>
           <a:p>
-            <a:pPr marL="0" indent="0">
+            <a:pPr indent="0" marL="0">
               <a:buNone/>
             </a:pPr>
             <a:r>
@@ -11422,7 +12275,7 @@
           <a:bodyPr wrap="square" rtlCol="0" anchor="ctr"/>
           <a:lstStyle/>
           <a:p>
-            <a:pPr marL="0" indent="0">
+            <a:pPr indent="0" marL="0">
               <a:buNone/>
             </a:pPr>
             <a:r>
@@ -11461,7 +12314,7 @@
           <a:bodyPr wrap="square" rtlCol="0" anchor="ctr"/>
           <a:lstStyle/>
           <a:p>
-            <a:pPr marL="0" indent="0">
+            <a:pPr indent="0" marL="0">
               <a:buNone/>
             </a:pPr>
             <a:r>
@@ -11500,7 +12353,7 @@
           <a:bodyPr wrap="square" rtlCol="0" anchor="ctr"/>
           <a:lstStyle/>
           <a:p>
-            <a:pPr marL="0" indent="0">
+            <a:pPr indent="0" marL="0">
               <a:buNone/>
             </a:pPr>
             <a:r>
@@ -11539,7 +12392,7 @@
           <a:bodyPr wrap="square" rtlCol="0" anchor="ctr"/>
           <a:lstStyle/>
           <a:p>
-            <a:pPr marL="0" indent="0">
+            <a:pPr indent="0" marL="0">
               <a:buNone/>
             </a:pPr>
             <a:r>
@@ -11573,7 +12426,6 @@
         <a:solidFill>
           <a:srgbClr val="14213D"/>
         </a:solidFill>
-        <a:effectLst/>
       </p:bgPr>
     </p:bg>
     <p:spTree>
@@ -11612,14 +12464,14 @@
       </p:sp>
       <p:pic>
         <p:nvPicPr>
-          <p:cNvPr id="3" name="Image 0" descr="preencoded.png"/>
+          <p:cNvPr id="3" name="Image 0" descr="preencoded.png">    </p:cNvPr>
           <p:cNvPicPr>
             <a:picLocks noChangeAspect="1"/>
           </p:cNvPicPr>
           <p:nvPr/>
         </p:nvPicPr>
         <p:blipFill>
-          <a:blip r:embed="rId3"/>
+          <a:blip r:embed="rId1"/>
           <a:stretch>
             <a:fillRect/>
           </a:stretch>
@@ -11655,7 +12507,7 @@
           <a:bodyPr wrap="square" rtlCol="0" anchor="ctr"/>
           <a:lstStyle/>
           <a:p>
-            <a:pPr marL="0" indent="0">
+            <a:pPr indent="0" marL="0">
               <a:buNone/>
             </a:pPr>
             <a:r>
@@ -11694,7 +12546,7 @@
           <a:bodyPr wrap="square" rtlCol="0" anchor="ctr"/>
           <a:lstStyle/>
           <a:p>
-            <a:pPr marL="0" indent="0">
+            <a:pPr indent="0" marL="0">
               <a:buNone/>
             </a:pPr>
             <a:r>
@@ -11755,7 +12607,7 @@
           <a:bodyPr wrap="square" rtlCol="0" anchor="ctr"/>
           <a:lstStyle/>
           <a:p>
-            <a:pPr marL="0" indent="0">
+            <a:pPr indent="0" marL="0">
               <a:buNone/>
             </a:pPr>
             <a:r>
@@ -11794,7 +12646,7 @@
           <a:bodyPr wrap="square" rtlCol="0" anchor="ctr"/>
           <a:lstStyle/>
           <a:p>
-            <a:pPr marL="0" indent="0">
+            <a:pPr indent="0" marL="0">
               <a:buNone/>
             </a:pPr>
             <a:r>
@@ -11833,7 +12685,7 @@
           <a:bodyPr wrap="square" rtlCol="0" anchor="ctr"/>
           <a:lstStyle/>
           <a:p>
-            <a:pPr marL="0" indent="0">
+            <a:pPr indent="0" marL="0">
               <a:buNone/>
             </a:pPr>
             <a:r>
@@ -11892,7 +12744,7 @@
           <a:bodyPr wrap="square" rtlCol="0" anchor="ctr"/>
           <a:lstStyle/>
           <a:p>
-            <a:pPr marL="0" indent="0">
+            <a:pPr indent="0" marL="0">
               <a:buNone/>
             </a:pPr>
             <a:r>
@@ -11951,7 +12803,7 @@
           <a:bodyPr wrap="square" rtlCol="0" anchor="ctr"/>
           <a:lstStyle/>
           <a:p>
-            <a:pPr marL="0" indent="0">
+            <a:pPr indent="0" marL="0">
               <a:buNone/>
             </a:pPr>
             <a:r>
@@ -12010,7 +12862,7 @@
           <a:bodyPr wrap="square" rtlCol="0" anchor="ctr"/>
           <a:lstStyle/>
           <a:p>
-            <a:pPr marL="0" indent="0">
+            <a:pPr indent="0" marL="0">
               <a:buNone/>
             </a:pPr>
             <a:r>
@@ -12329,299 +13181,4 @@
     </a:ext>
   </a:extLst>
 </a:theme>
-</file>
-
-<file path=ppt/theme/theme2.xml><?xml version="1.0" encoding="utf-8"?>
-<a:theme xmlns:a="http://schemas.openxmlformats.org/drawingml/2006/main" name="Office Theme">
-  <a:themeElements>
-    <a:clrScheme name="Office">
-      <a:dk1>
-        <a:sysClr val="windowText" lastClr="000000"/>
-      </a:dk1>
-      <a:lt1>
-        <a:sysClr val="window" lastClr="FFFFFF"/>
-      </a:lt1>
-      <a:dk2>
-        <a:srgbClr val="44546A"/>
-      </a:dk2>
-      <a:lt2>
-        <a:srgbClr val="E7E6E6"/>
-      </a:lt2>
-      <a:accent1>
-        <a:srgbClr val="4472C4"/>
-      </a:accent1>
-      <a:accent2>
-        <a:srgbClr val="ED7D31"/>
-      </a:accent2>
-      <a:accent3>
-        <a:srgbClr val="A5A5A5"/>
-      </a:accent3>
-      <a:accent4>
-        <a:srgbClr val="FFC000"/>
-      </a:accent4>
-      <a:accent5>
-        <a:srgbClr val="5B9BD5"/>
-      </a:accent5>
-      <a:accent6>
-        <a:srgbClr val="70AD47"/>
-      </a:accent6>
-      <a:hlink>
-        <a:srgbClr val="0563C1"/>
-      </a:hlink>
-      <a:folHlink>
-        <a:srgbClr val="954F72"/>
-      </a:folHlink>
-    </a:clrScheme>
-    <a:fontScheme name="Office">
-      <a:majorFont>
-        <a:latin typeface="Calibri Light" panose="020F0302020204030204"/>
-        <a:ea typeface=""/>
-        <a:cs typeface=""/>
-        <a:font script="Jpan" typeface="游ゴシック Light"/>
-        <a:font script="Hang" typeface="맑은 고딕"/>
-        <a:font script="Hans" typeface="等线 Light"/>
-        <a:font script="Hant" typeface="新細明體"/>
-        <a:font script="Arab" typeface="Times New Roman"/>
-        <a:font script="Hebr" typeface="Times New Roman"/>
-        <a:font script="Thai" typeface="Angsana New"/>
-        <a:font script="Ethi" typeface="Nyala"/>
-        <a:font script="Beng" typeface="Vrinda"/>
-        <a:font script="Gujr" typeface="Shruti"/>
-        <a:font script="Khmr" typeface="MoolBoran"/>
-        <a:font script="Knda" typeface="Tunga"/>
-        <a:font script="Guru" typeface="Raavi"/>
-        <a:font script="Cans" typeface="Euphemia"/>
-        <a:font script="Cher" typeface="Plantagenet Cherokee"/>
-        <a:font script="Yiii" typeface="Microsoft Yi Baiti"/>
-        <a:font script="Tibt" typeface="Microsoft Himalaya"/>
-        <a:font script="Thaa" typeface="MV Boli"/>
-        <a:font script="Deva" typeface="Mangal"/>
-        <a:font script="Telu" typeface="Gautami"/>
-        <a:font script="Taml" typeface="Latha"/>
-        <a:font script="Syrc" typeface="Estrangelo Edessa"/>
-        <a:font script="Orya" typeface="Kalinga"/>
-        <a:font script="Mlym" typeface="Kartika"/>
-        <a:font script="Laoo" typeface="DokChampa"/>
-        <a:font script="Sinh" typeface="Iskoola Pota"/>
-        <a:font script="Mong" typeface="Mongolian Baiti"/>
-        <a:font script="Viet" typeface="Times New Roman"/>
-        <a:font script="Uigh" typeface="Microsoft Uighur"/>
-        <a:font script="Geor" typeface="Sylfaen"/>
-        <a:font script="Armn" typeface="Arial"/>
-        <a:font script="Bugi" typeface="Leelawadee UI"/>
-        <a:font script="Bopo" typeface="Microsoft JhengHei"/>
-        <a:font script="Java" typeface="Javanese Text"/>
-        <a:font script="Lisu" typeface="Segoe UI"/>
-        <a:font script="Mymr" typeface="Myanmar Text"/>
-        <a:font script="Nkoo" typeface="Ebrima"/>
-        <a:font script="Olck" typeface="Nirmala UI"/>
-        <a:font script="Osma" typeface="Ebrima"/>
-        <a:font script="Phag" typeface="Phagspa"/>
-        <a:font script="Syrn" typeface="Estrangelo Edessa"/>
-        <a:font script="Syrj" typeface="Estrangelo Edessa"/>
-        <a:font script="Syre" typeface="Estrangelo Edessa"/>
-        <a:font script="Sora" typeface="Nirmala UI"/>
-        <a:font script="Tale" typeface="Microsoft Tai Le"/>
-        <a:font script="Talu" typeface="Microsoft New Tai Lue"/>
-        <a:font script="Tfng" typeface="Ebrima"/>
-      </a:majorFont>
-      <a:minorFont>
-        <a:latin typeface="Calibri" panose="020F0502020204030204"/>
-        <a:ea typeface=""/>
-        <a:cs typeface=""/>
-        <a:font script="Jpan" typeface="游ゴシック"/>
-        <a:font script="Hang" typeface="맑은 고딕"/>
-        <a:font script="Hans" typeface="等线"/>
-        <a:font script="Hant" typeface="新細明體"/>
-        <a:font script="Arab" typeface="Arial"/>
-        <a:font script="Hebr" typeface="Arial"/>
-        <a:font script="Thai" typeface="Cordia New"/>
-        <a:font script="Ethi" typeface="Nyala"/>
-        <a:font script="Beng" typeface="Vrinda"/>
-        <a:font script="Gujr" typeface="Shruti"/>
-        <a:font script="Khmr" typeface="DaunPenh"/>
-        <a:font script="Knda" typeface="Tunga"/>
-        <a:font script="Guru" typeface="Raavi"/>
-        <a:font script="Cans" typeface="Euphemia"/>
-        <a:font script="Cher" typeface="Plantagenet Cherokee"/>
-        <a:font script="Yiii" typeface="Microsoft Yi Baiti"/>
-        <a:font script="Tibt" typeface="Microsoft Himalaya"/>
-        <a:font script="Thaa" typeface="MV Boli"/>
-        <a:font script="Deva" typeface="Mangal"/>
-        <a:font script="Telu" typeface="Gautami"/>
-        <a:font script="Taml" typeface="Latha"/>
-        <a:font script="Syrc" typeface="Estrangelo Edessa"/>
-        <a:font script="Orya" typeface="Kalinga"/>
-        <a:font script="Mlym" typeface="Kartika"/>
-        <a:font script="Laoo" typeface="DokChampa"/>
-        <a:font script="Sinh" typeface="Iskoola Pota"/>
-        <a:font script="Mong" typeface="Mongolian Baiti"/>
-        <a:font script="Viet" typeface="Arial"/>
-        <a:font script="Uigh" typeface="Microsoft Uighur"/>
-        <a:font script="Geor" typeface="Sylfaen"/>
-        <a:font script="Armn" typeface="Arial"/>
-        <a:font script="Bugi" typeface="Leelawadee UI"/>
-        <a:font script="Bopo" typeface="Microsoft JhengHei"/>
-        <a:font script="Java" typeface="Javanese Text"/>
-        <a:font script="Lisu" typeface="Segoe UI"/>
-        <a:font script="Mymr" typeface="Myanmar Text"/>
-        <a:font script="Nkoo" typeface="Ebrima"/>
-        <a:font script="Olck" typeface="Nirmala UI"/>
-        <a:font script="Osma" typeface="Ebrima"/>
-        <a:font script="Phag" typeface="Phagspa"/>
-        <a:font script="Syrn" typeface="Estrangelo Edessa"/>
-        <a:font script="Syrj" typeface="Estrangelo Edessa"/>
-        <a:font script="Syre" typeface="Estrangelo Edessa"/>
-        <a:font script="Sora" typeface="Nirmala UI"/>
-        <a:font script="Tale" typeface="Microsoft Tai Le"/>
-        <a:font script="Talu" typeface="Microsoft New Tai Lue"/>
-        <a:font script="Tfng" typeface="Ebrima"/>
-      </a:minorFont>
-    </a:fontScheme>
-    <a:fmtScheme name="Office">
-      <a:fillStyleLst>
-        <a:solidFill>
-          <a:schemeClr val="phClr"/>
-        </a:solidFill>
-        <a:gradFill rotWithShape="1">
-          <a:gsLst>
-            <a:gs pos="0">
-              <a:schemeClr val="phClr">
-                <a:lumMod val="110000"/>
-                <a:satMod val="105000"/>
-                <a:tint val="67000"/>
-              </a:schemeClr>
-            </a:gs>
-            <a:gs pos="50000">
-              <a:schemeClr val="phClr">
-                <a:lumMod val="105000"/>
-                <a:satMod val="103000"/>
-                <a:tint val="73000"/>
-              </a:schemeClr>
-            </a:gs>
-            <a:gs pos="100000">
-              <a:schemeClr val="phClr">
-                <a:lumMod val="105000"/>
-                <a:satMod val="109000"/>
-                <a:tint val="81000"/>
-              </a:schemeClr>
-            </a:gs>
-          </a:gsLst>
-          <a:lin ang="5400000" scaled="0"/>
-        </a:gradFill>
-        <a:gradFill rotWithShape="1">
-          <a:gsLst>
-            <a:gs pos="0">
-              <a:schemeClr val="phClr">
-                <a:satMod val="103000"/>
-                <a:lumMod val="102000"/>
-                <a:tint val="94000"/>
-              </a:schemeClr>
-            </a:gs>
-            <a:gs pos="50000">
-              <a:schemeClr val="phClr">
-                <a:satMod val="110000"/>
-                <a:lumMod val="100000"/>
-                <a:shade val="100000"/>
-              </a:schemeClr>
-            </a:gs>
-            <a:gs pos="100000">
-              <a:schemeClr val="phClr">
-                <a:lumMod val="99000"/>
-                <a:satMod val="120000"/>
-                <a:shade val="78000"/>
-              </a:schemeClr>
-            </a:gs>
-          </a:gsLst>
-          <a:lin ang="5400000" scaled="0"/>
-        </a:gradFill>
-      </a:fillStyleLst>
-      <a:lnStyleLst>
-        <a:ln w="6350" cap="flat" cmpd="sng" algn="ctr">
-          <a:solidFill>
-            <a:schemeClr val="phClr"/>
-          </a:solidFill>
-          <a:prstDash val="solid"/>
-          <a:miter lim="800000"/>
-        </a:ln>
-        <a:ln w="12700" cap="flat" cmpd="sng" algn="ctr">
-          <a:solidFill>
-            <a:schemeClr val="phClr"/>
-          </a:solidFill>
-          <a:prstDash val="solid"/>
-          <a:miter lim="800000"/>
-        </a:ln>
-        <a:ln w="19050" cap="flat" cmpd="sng" algn="ctr">
-          <a:solidFill>
-            <a:schemeClr val="phClr"/>
-          </a:solidFill>
-          <a:prstDash val="solid"/>
-          <a:miter lim="800000"/>
-        </a:ln>
-      </a:lnStyleLst>
-      <a:effectStyleLst>
-        <a:effectStyle>
-          <a:effectLst/>
-        </a:effectStyle>
-        <a:effectStyle>
-          <a:effectLst/>
-        </a:effectStyle>
-        <a:effectStyle>
-          <a:effectLst>
-            <a:outerShdw blurRad="57150" dist="19050" dir="5400000" algn="ctr" rotWithShape="0">
-              <a:srgbClr val="000000">
-                <a:alpha val="63000"/>
-              </a:srgbClr>
-            </a:outerShdw>
-          </a:effectLst>
-        </a:effectStyle>
-      </a:effectStyleLst>
-      <a:bgFillStyleLst>
-        <a:solidFill>
-          <a:schemeClr val="phClr"/>
-        </a:solidFill>
-        <a:solidFill>
-          <a:schemeClr val="phClr">
-            <a:tint val="95000"/>
-            <a:satMod val="170000"/>
-          </a:schemeClr>
-        </a:solidFill>
-        <a:gradFill rotWithShape="1">
-          <a:gsLst>
-            <a:gs pos="0">
-              <a:schemeClr val="phClr">
-                <a:tint val="93000"/>
-                <a:satMod val="150000"/>
-                <a:shade val="98000"/>
-                <a:lumMod val="102000"/>
-              </a:schemeClr>
-            </a:gs>
-            <a:gs pos="50000">
-              <a:schemeClr val="phClr">
-                <a:tint val="98000"/>
-                <a:satMod val="130000"/>
-                <a:shade val="90000"/>
-                <a:lumMod val="103000"/>
-              </a:schemeClr>
-            </a:gs>
-            <a:gs pos="100000">
-              <a:schemeClr val="phClr">
-                <a:shade val="63000"/>
-                <a:satMod val="120000"/>
-              </a:schemeClr>
-            </a:gs>
-          </a:gsLst>
-          <a:lin ang="5400000" scaled="0"/>
-        </a:gradFill>
-      </a:bgFillStyleLst>
-    </a:fmtScheme>
-  </a:themeElements>
-  <a:objectDefaults/>
-  <a:extraClrSchemeLst/>
-  <a:extLst>
-    <a:ext uri="{05A4C25C-085E-4340-85A3-A5531E510DB2}">
-      <thm15:themeFamily xmlns:thm15="http://schemas.microsoft.com/office/thememl/2012/main" name="Office Theme" id="{62F939B6-93AF-4DB8-9C6B-D6C7DFDC589F}" vid="{4A3C46E8-61CC-4603-A589-7422A47A8E4A}"/>
-    </a:ext>
-  </a:extLst>
-</a:theme>
 </file>